--- a/Build My Life.pptx
+++ b/Build My Life.pptx
@@ -6,13 +6,19 @@
   </p:sldMasterIdLst>
   <p:sldIdLst>
     <p:sldId id="274" r:id="rId2"/>
-    <p:sldId id="280" r:id="rId3"/>
-    <p:sldId id="281" r:id="rId4"/>
-    <p:sldId id="282" r:id="rId5"/>
-    <p:sldId id="283" r:id="rId6"/>
-    <p:sldId id="284" r:id="rId7"/>
-    <p:sldId id="285" r:id="rId8"/>
-    <p:sldId id="286" r:id="rId9"/>
+    <p:sldId id="287" r:id="rId3"/>
+    <p:sldId id="280" r:id="rId4"/>
+    <p:sldId id="281" r:id="rId5"/>
+    <p:sldId id="288" r:id="rId6"/>
+    <p:sldId id="282" r:id="rId7"/>
+    <p:sldId id="289" r:id="rId8"/>
+    <p:sldId id="283" r:id="rId9"/>
+    <p:sldId id="290" r:id="rId10"/>
+    <p:sldId id="284" r:id="rId11"/>
+    <p:sldId id="291" r:id="rId12"/>
+    <p:sldId id="285" r:id="rId13"/>
+    <p:sldId id="292" r:id="rId14"/>
+    <p:sldId id="293" r:id="rId15"/>
   </p:sldIdLst>
   <p:sldSz cx="9144000" cy="6858000" type="screen4x3"/>
   <p:notesSz cx="6858000" cy="9144000"/>
@@ -250,7 +256,7 @@
           <a:p>
             <a:fld id="{E759A0DE-F190-5444-87AC-4719D5F20D15}" type="datetimeFigureOut">
               <a:rPr lang="en-US" smtClean="0"/>
-              <a:t>6/19/26</a:t>
+              <a:t>6/20/26</a:t>
             </a:fld>
             <a:endParaRPr lang="en-US"/>
           </a:p>
@@ -420,7 +426,7 @@
           <a:p>
             <a:fld id="{E759A0DE-F190-5444-87AC-4719D5F20D15}" type="datetimeFigureOut">
               <a:rPr lang="en-US" smtClean="0"/>
-              <a:t>6/19/26</a:t>
+              <a:t>6/20/26</a:t>
             </a:fld>
             <a:endParaRPr lang="en-US"/>
           </a:p>
@@ -600,7 +606,7 @@
           <a:p>
             <a:fld id="{E759A0DE-F190-5444-87AC-4719D5F20D15}" type="datetimeFigureOut">
               <a:rPr lang="en-US" smtClean="0"/>
-              <a:t>6/19/26</a:t>
+              <a:t>6/20/26</a:t>
             </a:fld>
             <a:endParaRPr lang="en-US"/>
           </a:p>
@@ -770,7 +776,7 @@
           <a:p>
             <a:fld id="{E759A0DE-F190-5444-87AC-4719D5F20D15}" type="datetimeFigureOut">
               <a:rPr lang="en-US" smtClean="0"/>
-              <a:t>6/19/26</a:t>
+              <a:t>6/20/26</a:t>
             </a:fld>
             <a:endParaRPr lang="en-US"/>
           </a:p>
@@ -1016,7 +1022,7 @@
           <a:p>
             <a:fld id="{E759A0DE-F190-5444-87AC-4719D5F20D15}" type="datetimeFigureOut">
               <a:rPr lang="en-US" smtClean="0"/>
-              <a:t>6/19/26</a:t>
+              <a:t>6/20/26</a:t>
             </a:fld>
             <a:endParaRPr lang="en-US"/>
           </a:p>
@@ -1248,7 +1254,7 @@
           <a:p>
             <a:fld id="{E759A0DE-F190-5444-87AC-4719D5F20D15}" type="datetimeFigureOut">
               <a:rPr lang="en-US" smtClean="0"/>
-              <a:t>6/19/26</a:t>
+              <a:t>6/20/26</a:t>
             </a:fld>
             <a:endParaRPr lang="en-US"/>
           </a:p>
@@ -1615,7 +1621,7 @@
           <a:p>
             <a:fld id="{E759A0DE-F190-5444-87AC-4719D5F20D15}" type="datetimeFigureOut">
               <a:rPr lang="en-US" smtClean="0"/>
-              <a:t>6/19/26</a:t>
+              <a:t>6/20/26</a:t>
             </a:fld>
             <a:endParaRPr lang="en-US"/>
           </a:p>
@@ -1733,7 +1739,7 @@
           <a:p>
             <a:fld id="{E759A0DE-F190-5444-87AC-4719D5F20D15}" type="datetimeFigureOut">
               <a:rPr lang="en-US" smtClean="0"/>
-              <a:t>6/19/26</a:t>
+              <a:t>6/20/26</a:t>
             </a:fld>
             <a:endParaRPr lang="en-US"/>
           </a:p>
@@ -1828,7 +1834,7 @@
           <a:p>
             <a:fld id="{E759A0DE-F190-5444-87AC-4719D5F20D15}" type="datetimeFigureOut">
               <a:rPr lang="en-US" smtClean="0"/>
-              <a:t>6/19/26</a:t>
+              <a:t>6/20/26</a:t>
             </a:fld>
             <a:endParaRPr lang="en-US"/>
           </a:p>
@@ -2105,7 +2111,7 @@
           <a:p>
             <a:fld id="{E759A0DE-F190-5444-87AC-4719D5F20D15}" type="datetimeFigureOut">
               <a:rPr lang="en-US" smtClean="0"/>
-              <a:t>6/19/26</a:t>
+              <a:t>6/20/26</a:t>
             </a:fld>
             <a:endParaRPr lang="en-US"/>
           </a:p>
@@ -2362,7 +2368,7 @@
           <a:p>
             <a:fld id="{E759A0DE-F190-5444-87AC-4719D5F20D15}" type="datetimeFigureOut">
               <a:rPr lang="en-US" smtClean="0"/>
-              <a:t>6/19/26</a:t>
+              <a:t>6/20/26</a:t>
             </a:fld>
             <a:endParaRPr lang="en-US"/>
           </a:p>
@@ -2575,7 +2581,7 @@
           <a:p>
             <a:fld id="{E759A0DE-F190-5444-87AC-4719D5F20D15}" type="datetimeFigureOut">
               <a:rPr lang="en-US" smtClean="0"/>
-              <a:t>6/19/26</a:t>
+              <a:t>6/20/26</a:t>
             </a:fld>
             <a:endParaRPr lang="en-US"/>
           </a:p>
@@ -3049,7 +3055,899 @@
 </p:sld>
 </file>
 
+<file path=ppt/slides/slide10.xml><?xml version="1.0" encoding="utf-8"?>
+<p:sld xmlns:a="http://schemas.openxmlformats.org/drawingml/2006/main" xmlns:r="http://schemas.openxmlformats.org/officeDocument/2006/relationships" xmlns:p="http://schemas.openxmlformats.org/presentationml/2006/main">
+  <p:cSld>
+    <p:bg>
+      <p:bgPr>
+        <a:solidFill>
+          <a:schemeClr val="tx1"/>
+        </a:solidFill>
+        <a:effectLst/>
+      </p:bgPr>
+    </p:bg>
+    <p:spTree>
+      <p:nvGrpSpPr>
+        <p:cNvPr id="1" name="">
+          <a:extLst>
+            <a:ext uri="{FF2B5EF4-FFF2-40B4-BE49-F238E27FC236}">
+              <a16:creationId xmlns:a16="http://schemas.microsoft.com/office/drawing/2014/main" id="{B6B9810D-6BC3-0F63-D153-332B7E51D93E}"/>
+            </a:ext>
+          </a:extLst>
+        </p:cNvPr>
+        <p:cNvGrpSpPr/>
+        <p:nvPr/>
+      </p:nvGrpSpPr>
+      <p:grpSpPr>
+        <a:xfrm>
+          <a:off x="0" y="0"/>
+          <a:ext cx="0" cy="0"/>
+          <a:chOff x="0" y="0"/>
+          <a:chExt cx="0" cy="0"/>
+        </a:xfrm>
+      </p:grpSpPr>
+      <p:sp>
+        <p:nvSpPr>
+          <p:cNvPr id="3" name="Subtitle 2">
+            <a:extLst>
+              <a:ext uri="{FF2B5EF4-FFF2-40B4-BE49-F238E27FC236}">
+                <a16:creationId xmlns:a16="http://schemas.microsoft.com/office/drawing/2014/main" id="{AF98F530-F40F-0DEF-A053-08666EEA3A7C}"/>
+              </a:ext>
+            </a:extLst>
+          </p:cNvPr>
+          <p:cNvSpPr>
+            <a:spLocks noGrp="1"/>
+          </p:cNvSpPr>
+          <p:nvPr>
+            <p:ph type="subTitle" idx="1"/>
+          </p:nvPr>
+        </p:nvSpPr>
+        <p:spPr>
+          <a:xfrm>
+            <a:off x="144379" y="228600"/>
+            <a:ext cx="8903369" cy="6431280"/>
+          </a:xfrm>
+        </p:spPr>
+        <p:txBody>
+          <a:bodyPr>
+            <a:noAutofit/>
+          </a:bodyPr>
+          <a:lstStyle/>
+          <a:p>
+            <a:endParaRPr lang="en-US" sz="4000" dirty="0">
+              <a:solidFill>
+                <a:schemeClr val="bg1"/>
+              </a:solidFill>
+              <a:latin typeface="Avenir Medium" panose="02000503020000020003" pitchFamily="2" charset="0"/>
+              <a:ea typeface="Bodoni Ornaments" pitchFamily="2" charset="0"/>
+            </a:endParaRPr>
+          </a:p>
+          <a:p>
+            <a:r>
+              <a:rPr lang="en-US" sz="4000" dirty="0">
+                <a:solidFill>
+                  <a:schemeClr val="bg1"/>
+                </a:solidFill>
+                <a:latin typeface="Avenir Medium" panose="02000503020000020003" pitchFamily="2" charset="0"/>
+                <a:ea typeface="Bodoni Ornaments" pitchFamily="2" charset="0"/>
+              </a:rPr>
+              <a:t>Holy there is no one like You </a:t>
+            </a:r>
+          </a:p>
+          <a:p>
+            <a:r>
+              <a:rPr lang="en-US" sz="4000" dirty="0">
+                <a:solidFill>
+                  <a:schemeClr val="bg1"/>
+                </a:solidFill>
+                <a:latin typeface="Avenir Medium" panose="02000503020000020003" pitchFamily="2" charset="0"/>
+                <a:ea typeface="Bodoni Ornaments" pitchFamily="2" charset="0"/>
+              </a:rPr>
+              <a:t>There is none beside You</a:t>
+            </a:r>
+          </a:p>
+          <a:p>
+            <a:r>
+              <a:rPr lang="en-US" sz="4000" dirty="0">
+                <a:solidFill>
+                  <a:schemeClr val="bg1"/>
+                </a:solidFill>
+                <a:latin typeface="Avenir Medium" panose="02000503020000020003" pitchFamily="2" charset="0"/>
+                <a:ea typeface="Bodoni Ornaments" pitchFamily="2" charset="0"/>
+              </a:rPr>
+              <a:t>Open up my eyes in wonder </a:t>
+            </a:r>
+          </a:p>
+          <a:p>
+            <a:endParaRPr lang="en-US" sz="4000" dirty="0">
+              <a:solidFill>
+                <a:schemeClr val="bg1"/>
+              </a:solidFill>
+              <a:latin typeface="Avenir Medium" panose="02000503020000020003" pitchFamily="2" charset="0"/>
+              <a:ea typeface="Bodoni Ornaments" pitchFamily="2" charset="0"/>
+            </a:endParaRPr>
+          </a:p>
+        </p:txBody>
+      </p:sp>
+    </p:spTree>
+    <p:extLst>
+      <p:ext uri="{BB962C8B-B14F-4D97-AF65-F5344CB8AC3E}">
+        <p14:creationId xmlns:p14="http://schemas.microsoft.com/office/powerpoint/2010/main" val="2497629168"/>
+      </p:ext>
+    </p:extLst>
+  </p:cSld>
+  <p:clrMapOvr>
+    <a:masterClrMapping/>
+  </p:clrMapOvr>
+</p:sld>
+</file>
+
+<file path=ppt/slides/slide11.xml><?xml version="1.0" encoding="utf-8"?>
+<p:sld xmlns:a="http://schemas.openxmlformats.org/drawingml/2006/main" xmlns:r="http://schemas.openxmlformats.org/officeDocument/2006/relationships" xmlns:p="http://schemas.openxmlformats.org/presentationml/2006/main">
+  <p:cSld>
+    <p:bg>
+      <p:bgPr>
+        <a:solidFill>
+          <a:schemeClr val="tx1"/>
+        </a:solidFill>
+        <a:effectLst/>
+      </p:bgPr>
+    </p:bg>
+    <p:spTree>
+      <p:nvGrpSpPr>
+        <p:cNvPr id="1" name="">
+          <a:extLst>
+            <a:ext uri="{FF2B5EF4-FFF2-40B4-BE49-F238E27FC236}">
+              <a16:creationId xmlns:a16="http://schemas.microsoft.com/office/drawing/2014/main" id="{BFD21FA9-EB70-C7AE-CCAD-0F83D843720C}"/>
+            </a:ext>
+          </a:extLst>
+        </p:cNvPr>
+        <p:cNvGrpSpPr/>
+        <p:nvPr/>
+      </p:nvGrpSpPr>
+      <p:grpSpPr>
+        <a:xfrm>
+          <a:off x="0" y="0"/>
+          <a:ext cx="0" cy="0"/>
+          <a:chOff x="0" y="0"/>
+          <a:chExt cx="0" cy="0"/>
+        </a:xfrm>
+      </p:grpSpPr>
+      <p:sp>
+        <p:nvSpPr>
+          <p:cNvPr id="3" name="Subtitle 2">
+            <a:extLst>
+              <a:ext uri="{FF2B5EF4-FFF2-40B4-BE49-F238E27FC236}">
+                <a16:creationId xmlns:a16="http://schemas.microsoft.com/office/drawing/2014/main" id="{42A39DA4-8F5F-C79E-2EBB-1E2176F112AC}"/>
+              </a:ext>
+            </a:extLst>
+          </p:cNvPr>
+          <p:cNvSpPr>
+            <a:spLocks noGrp="1"/>
+          </p:cNvSpPr>
+          <p:nvPr>
+            <p:ph type="subTitle" idx="1"/>
+          </p:nvPr>
+        </p:nvSpPr>
+        <p:spPr>
+          <a:xfrm>
+            <a:off x="144379" y="228600"/>
+            <a:ext cx="8903369" cy="6431280"/>
+          </a:xfrm>
+        </p:spPr>
+        <p:txBody>
+          <a:bodyPr>
+            <a:noAutofit/>
+          </a:bodyPr>
+          <a:lstStyle/>
+          <a:p>
+            <a:endParaRPr lang="en-US" sz="4000" dirty="0">
+              <a:solidFill>
+                <a:schemeClr val="bg1"/>
+              </a:solidFill>
+              <a:latin typeface="Avenir Medium" panose="02000503020000020003" pitchFamily="2" charset="0"/>
+              <a:ea typeface="Bodoni Ornaments" pitchFamily="2" charset="0"/>
+            </a:endParaRPr>
+          </a:p>
+          <a:p>
+            <a:r>
+              <a:rPr lang="en-US" sz="4000" dirty="0">
+                <a:solidFill>
+                  <a:schemeClr val="bg1"/>
+                </a:solidFill>
+                <a:latin typeface="Avenir Medium" panose="02000503020000020003" pitchFamily="2" charset="0"/>
+                <a:ea typeface="Bodoni Ornaments" pitchFamily="2" charset="0"/>
+              </a:rPr>
+              <a:t>Show me who You are</a:t>
+            </a:r>
+          </a:p>
+          <a:p>
+            <a:r>
+              <a:rPr lang="en-US" sz="4000" dirty="0">
+                <a:solidFill>
+                  <a:schemeClr val="bg1"/>
+                </a:solidFill>
+                <a:latin typeface="Avenir Medium" panose="02000503020000020003" pitchFamily="2" charset="0"/>
+                <a:ea typeface="Bodoni Ornaments" pitchFamily="2" charset="0"/>
+              </a:rPr>
+              <a:t>And fill me with Your heart</a:t>
+            </a:r>
+          </a:p>
+          <a:p>
+            <a:r>
+              <a:rPr lang="en-US" sz="4000" dirty="0">
+                <a:solidFill>
+                  <a:schemeClr val="bg1"/>
+                </a:solidFill>
+                <a:latin typeface="Avenir Medium" panose="02000503020000020003" pitchFamily="2" charset="0"/>
+                <a:ea typeface="Bodoni Ornaments" pitchFamily="2" charset="0"/>
+              </a:rPr>
+              <a:t>And lead me in Your love</a:t>
+            </a:r>
+          </a:p>
+          <a:p>
+            <a:r>
+              <a:rPr lang="en-US" sz="4000" dirty="0">
+                <a:solidFill>
+                  <a:schemeClr val="bg1"/>
+                </a:solidFill>
+                <a:latin typeface="Avenir Medium" panose="02000503020000020003" pitchFamily="2" charset="0"/>
+                <a:ea typeface="Bodoni Ornaments" pitchFamily="2" charset="0"/>
+              </a:rPr>
+              <a:t>to those around me</a:t>
+            </a:r>
+          </a:p>
+          <a:p>
+            <a:endParaRPr lang="en-US" sz="4000" dirty="0">
+              <a:solidFill>
+                <a:schemeClr val="bg1"/>
+              </a:solidFill>
+              <a:latin typeface="Avenir Medium" panose="02000503020000020003" pitchFamily="2" charset="0"/>
+              <a:ea typeface="Bodoni Ornaments" pitchFamily="2" charset="0"/>
+            </a:endParaRPr>
+          </a:p>
+        </p:txBody>
+      </p:sp>
+    </p:spTree>
+    <p:extLst>
+      <p:ext uri="{BB962C8B-B14F-4D97-AF65-F5344CB8AC3E}">
+        <p14:creationId xmlns:p14="http://schemas.microsoft.com/office/powerpoint/2010/main" val="2844247244"/>
+      </p:ext>
+    </p:extLst>
+  </p:cSld>
+  <p:clrMapOvr>
+    <a:masterClrMapping/>
+  </p:clrMapOvr>
+</p:sld>
+</file>
+
+<file path=ppt/slides/slide12.xml><?xml version="1.0" encoding="utf-8"?>
+<p:sld xmlns:a="http://schemas.openxmlformats.org/drawingml/2006/main" xmlns:r="http://schemas.openxmlformats.org/officeDocument/2006/relationships" xmlns:p="http://schemas.openxmlformats.org/presentationml/2006/main">
+  <p:cSld>
+    <p:bg>
+      <p:bgPr>
+        <a:solidFill>
+          <a:schemeClr val="tx1"/>
+        </a:solidFill>
+        <a:effectLst/>
+      </p:bgPr>
+    </p:bg>
+    <p:spTree>
+      <p:nvGrpSpPr>
+        <p:cNvPr id="1" name="">
+          <a:extLst>
+            <a:ext uri="{FF2B5EF4-FFF2-40B4-BE49-F238E27FC236}">
+              <a16:creationId xmlns:a16="http://schemas.microsoft.com/office/drawing/2014/main" id="{F0F59531-CDDD-0EAF-CCC9-10BF02E4EEA3}"/>
+            </a:ext>
+          </a:extLst>
+        </p:cNvPr>
+        <p:cNvGrpSpPr/>
+        <p:nvPr/>
+      </p:nvGrpSpPr>
+      <p:grpSpPr>
+        <a:xfrm>
+          <a:off x="0" y="0"/>
+          <a:ext cx="0" cy="0"/>
+          <a:chOff x="0" y="0"/>
+          <a:chExt cx="0" cy="0"/>
+        </a:xfrm>
+      </p:grpSpPr>
+      <p:sp>
+        <p:nvSpPr>
+          <p:cNvPr id="3" name="Subtitle 2">
+            <a:extLst>
+              <a:ext uri="{FF2B5EF4-FFF2-40B4-BE49-F238E27FC236}">
+                <a16:creationId xmlns:a16="http://schemas.microsoft.com/office/drawing/2014/main" id="{5C6F3413-02E2-6B03-81F0-64323C17CF88}"/>
+              </a:ext>
+            </a:extLst>
+          </p:cNvPr>
+          <p:cNvSpPr>
+            <a:spLocks noGrp="1"/>
+          </p:cNvSpPr>
+          <p:nvPr>
+            <p:ph type="subTitle" idx="1"/>
+          </p:nvPr>
+        </p:nvSpPr>
+        <p:spPr>
+          <a:xfrm>
+            <a:off x="144379" y="228600"/>
+            <a:ext cx="8903369" cy="6431280"/>
+          </a:xfrm>
+        </p:spPr>
+        <p:txBody>
+          <a:bodyPr>
+            <a:noAutofit/>
+          </a:bodyPr>
+          <a:lstStyle/>
+          <a:p>
+            <a:endParaRPr lang="en-US" sz="4000" dirty="0">
+              <a:solidFill>
+                <a:schemeClr val="bg1"/>
+              </a:solidFill>
+              <a:latin typeface="Avenir Medium" panose="02000503020000020003" pitchFamily="2" charset="0"/>
+              <a:ea typeface="Bodoni Ornaments" pitchFamily="2" charset="0"/>
+            </a:endParaRPr>
+          </a:p>
+          <a:p>
+            <a:r>
+              <a:rPr lang="en-US" sz="4000" dirty="0">
+                <a:solidFill>
+                  <a:schemeClr val="bg1"/>
+                </a:solidFill>
+                <a:latin typeface="Avenir Medium" panose="02000503020000020003" pitchFamily="2" charset="0"/>
+                <a:ea typeface="Bodoni Ornaments" pitchFamily="2" charset="0"/>
+              </a:rPr>
+              <a:t>I will build my life, </a:t>
+            </a:r>
+          </a:p>
+          <a:p>
+            <a:r>
+              <a:rPr lang="en-US" sz="4000" dirty="0">
+                <a:solidFill>
+                  <a:schemeClr val="bg1"/>
+                </a:solidFill>
+                <a:latin typeface="Avenir Medium" panose="02000503020000020003" pitchFamily="2" charset="0"/>
+                <a:ea typeface="Bodoni Ornaments" pitchFamily="2" charset="0"/>
+              </a:rPr>
+              <a:t>upon Your love</a:t>
+            </a:r>
+          </a:p>
+          <a:p>
+            <a:r>
+              <a:rPr lang="en-US" sz="4000" dirty="0">
+                <a:solidFill>
+                  <a:schemeClr val="bg1"/>
+                </a:solidFill>
+                <a:latin typeface="Avenir Medium" panose="02000503020000020003" pitchFamily="2" charset="0"/>
+                <a:ea typeface="Bodoni Ornaments" pitchFamily="2" charset="0"/>
+              </a:rPr>
+              <a:t>It is a firm foundation</a:t>
+            </a:r>
+          </a:p>
+          <a:p>
+            <a:endParaRPr lang="en-US" sz="4000">
+              <a:solidFill>
+                <a:schemeClr val="bg1"/>
+              </a:solidFill>
+              <a:latin typeface="Avenir Medium" panose="02000503020000020003" pitchFamily="2" charset="0"/>
+              <a:ea typeface="Bodoni Ornaments" pitchFamily="2" charset="0"/>
+            </a:endParaRPr>
+          </a:p>
+          <a:p>
+            <a:r>
+              <a:rPr lang="en-US" sz="4000">
+                <a:solidFill>
+                  <a:schemeClr val="bg1"/>
+                </a:solidFill>
+                <a:latin typeface="Avenir Medium" panose="02000503020000020003" pitchFamily="2" charset="0"/>
+                <a:ea typeface="Bodoni Ornaments" pitchFamily="2" charset="0"/>
+              </a:rPr>
+              <a:t>I </a:t>
+            </a:r>
+            <a:r>
+              <a:rPr lang="en-US" sz="4000" dirty="0">
+                <a:solidFill>
+                  <a:schemeClr val="bg1"/>
+                </a:solidFill>
+                <a:latin typeface="Avenir Medium" panose="02000503020000020003" pitchFamily="2" charset="0"/>
+                <a:ea typeface="Bodoni Ornaments" pitchFamily="2" charset="0"/>
+              </a:rPr>
+              <a:t>will put my trust, </a:t>
+            </a:r>
+          </a:p>
+          <a:p>
+            <a:r>
+              <a:rPr lang="en-US" sz="4000" dirty="0">
+                <a:solidFill>
+                  <a:schemeClr val="bg1"/>
+                </a:solidFill>
+                <a:latin typeface="Avenir Medium" panose="02000503020000020003" pitchFamily="2" charset="0"/>
+                <a:ea typeface="Bodoni Ornaments" pitchFamily="2" charset="0"/>
+              </a:rPr>
+              <a:t>in You alone</a:t>
+            </a:r>
+          </a:p>
+          <a:p>
+            <a:r>
+              <a:rPr lang="en-US" sz="4000" dirty="0">
+                <a:solidFill>
+                  <a:schemeClr val="bg1"/>
+                </a:solidFill>
+                <a:latin typeface="Avenir Medium" panose="02000503020000020003" pitchFamily="2" charset="0"/>
+                <a:ea typeface="Bodoni Ornaments" pitchFamily="2" charset="0"/>
+              </a:rPr>
+              <a:t>And I will not be shaken</a:t>
+            </a:r>
+          </a:p>
+          <a:p>
+            <a:endParaRPr lang="en-US" sz="4000" dirty="0">
+              <a:solidFill>
+                <a:schemeClr val="bg1"/>
+              </a:solidFill>
+              <a:latin typeface="Avenir Medium" panose="02000503020000020003" pitchFamily="2" charset="0"/>
+              <a:ea typeface="Bodoni Ornaments" pitchFamily="2" charset="0"/>
+            </a:endParaRPr>
+          </a:p>
+        </p:txBody>
+      </p:sp>
+    </p:spTree>
+    <p:extLst>
+      <p:ext uri="{BB962C8B-B14F-4D97-AF65-F5344CB8AC3E}">
+        <p14:creationId xmlns:p14="http://schemas.microsoft.com/office/powerpoint/2010/main" val="3710739980"/>
+      </p:ext>
+    </p:extLst>
+  </p:cSld>
+  <p:clrMapOvr>
+    <a:masterClrMapping/>
+  </p:clrMapOvr>
+</p:sld>
+</file>
+
+<file path=ppt/slides/slide13.xml><?xml version="1.0" encoding="utf-8"?>
+<p:sld xmlns:a="http://schemas.openxmlformats.org/drawingml/2006/main" xmlns:r="http://schemas.openxmlformats.org/officeDocument/2006/relationships" xmlns:p="http://schemas.openxmlformats.org/presentationml/2006/main">
+  <p:cSld>
+    <p:bg>
+      <p:bgPr>
+        <a:solidFill>
+          <a:schemeClr val="tx1"/>
+        </a:solidFill>
+        <a:effectLst/>
+      </p:bgPr>
+    </p:bg>
+    <p:spTree>
+      <p:nvGrpSpPr>
+        <p:cNvPr id="1" name="">
+          <a:extLst>
+            <a:ext uri="{FF2B5EF4-FFF2-40B4-BE49-F238E27FC236}">
+              <a16:creationId xmlns:a16="http://schemas.microsoft.com/office/drawing/2014/main" id="{8E8582F0-A05E-958C-42CD-6B73BF069417}"/>
+            </a:ext>
+          </a:extLst>
+        </p:cNvPr>
+        <p:cNvGrpSpPr/>
+        <p:nvPr/>
+      </p:nvGrpSpPr>
+      <p:grpSpPr>
+        <a:xfrm>
+          <a:off x="0" y="0"/>
+          <a:ext cx="0" cy="0"/>
+          <a:chOff x="0" y="0"/>
+          <a:chExt cx="0" cy="0"/>
+        </a:xfrm>
+      </p:grpSpPr>
+      <p:sp>
+        <p:nvSpPr>
+          <p:cNvPr id="3" name="Subtitle 2">
+            <a:extLst>
+              <a:ext uri="{FF2B5EF4-FFF2-40B4-BE49-F238E27FC236}">
+                <a16:creationId xmlns:a16="http://schemas.microsoft.com/office/drawing/2014/main" id="{22340758-6221-529C-CE2C-F9A10BC09ED4}"/>
+              </a:ext>
+            </a:extLst>
+          </p:cNvPr>
+          <p:cNvSpPr>
+            <a:spLocks noGrp="1"/>
+          </p:cNvSpPr>
+          <p:nvPr>
+            <p:ph type="subTitle" idx="1"/>
+          </p:nvPr>
+        </p:nvSpPr>
+        <p:spPr>
+          <a:xfrm>
+            <a:off x="144379" y="228600"/>
+            <a:ext cx="8903369" cy="6431280"/>
+          </a:xfrm>
+        </p:spPr>
+        <p:txBody>
+          <a:bodyPr>
+            <a:noAutofit/>
+          </a:bodyPr>
+          <a:lstStyle/>
+          <a:p>
+            <a:endParaRPr lang="en-US" sz="4000" dirty="0">
+              <a:solidFill>
+                <a:schemeClr val="bg1"/>
+              </a:solidFill>
+              <a:latin typeface="Avenir Medium" panose="02000503020000020003" pitchFamily="2" charset="0"/>
+              <a:ea typeface="Bodoni Ornaments" pitchFamily="2" charset="0"/>
+            </a:endParaRPr>
+          </a:p>
+          <a:p>
+            <a:r>
+              <a:rPr lang="en-US" sz="4000" dirty="0">
+                <a:solidFill>
+                  <a:schemeClr val="bg1"/>
+                </a:solidFill>
+                <a:latin typeface="Avenir Medium" panose="02000503020000020003" pitchFamily="2" charset="0"/>
+                <a:ea typeface="Bodoni Ornaments" pitchFamily="2" charset="0"/>
+              </a:rPr>
+              <a:t>Holy there is no one like You </a:t>
+            </a:r>
+          </a:p>
+          <a:p>
+            <a:r>
+              <a:rPr lang="en-US" sz="4000" dirty="0">
+                <a:solidFill>
+                  <a:schemeClr val="bg1"/>
+                </a:solidFill>
+                <a:latin typeface="Avenir Medium" panose="02000503020000020003" pitchFamily="2" charset="0"/>
+                <a:ea typeface="Bodoni Ornaments" pitchFamily="2" charset="0"/>
+              </a:rPr>
+              <a:t>There is none beside You</a:t>
+            </a:r>
+          </a:p>
+          <a:p>
+            <a:r>
+              <a:rPr lang="en-US" sz="4000" dirty="0">
+                <a:solidFill>
+                  <a:schemeClr val="bg1"/>
+                </a:solidFill>
+                <a:latin typeface="Avenir Medium" panose="02000503020000020003" pitchFamily="2" charset="0"/>
+                <a:ea typeface="Bodoni Ornaments" pitchFamily="2" charset="0"/>
+              </a:rPr>
+              <a:t>Open up my eyes in wonder </a:t>
+            </a:r>
+          </a:p>
+          <a:p>
+            <a:endParaRPr lang="en-US" sz="4000" dirty="0">
+              <a:solidFill>
+                <a:schemeClr val="bg1"/>
+              </a:solidFill>
+              <a:latin typeface="Avenir Medium" panose="02000503020000020003" pitchFamily="2" charset="0"/>
+              <a:ea typeface="Bodoni Ornaments" pitchFamily="2" charset="0"/>
+            </a:endParaRPr>
+          </a:p>
+        </p:txBody>
+      </p:sp>
+    </p:spTree>
+    <p:extLst>
+      <p:ext uri="{BB962C8B-B14F-4D97-AF65-F5344CB8AC3E}">
+        <p14:creationId xmlns:p14="http://schemas.microsoft.com/office/powerpoint/2010/main" val="355866748"/>
+      </p:ext>
+    </p:extLst>
+  </p:cSld>
+  <p:clrMapOvr>
+    <a:masterClrMapping/>
+  </p:clrMapOvr>
+</p:sld>
+</file>
+
+<file path=ppt/slides/slide14.xml><?xml version="1.0" encoding="utf-8"?>
+<p:sld xmlns:a="http://schemas.openxmlformats.org/drawingml/2006/main" xmlns:r="http://schemas.openxmlformats.org/officeDocument/2006/relationships" xmlns:p="http://schemas.openxmlformats.org/presentationml/2006/main">
+  <p:cSld>
+    <p:bg>
+      <p:bgPr>
+        <a:solidFill>
+          <a:schemeClr val="tx1"/>
+        </a:solidFill>
+        <a:effectLst/>
+      </p:bgPr>
+    </p:bg>
+    <p:spTree>
+      <p:nvGrpSpPr>
+        <p:cNvPr id="1" name="">
+          <a:extLst>
+            <a:ext uri="{FF2B5EF4-FFF2-40B4-BE49-F238E27FC236}">
+              <a16:creationId xmlns:a16="http://schemas.microsoft.com/office/drawing/2014/main" id="{5DB13959-7005-B992-621B-D633D9930C62}"/>
+            </a:ext>
+          </a:extLst>
+        </p:cNvPr>
+        <p:cNvGrpSpPr/>
+        <p:nvPr/>
+      </p:nvGrpSpPr>
+      <p:grpSpPr>
+        <a:xfrm>
+          <a:off x="0" y="0"/>
+          <a:ext cx="0" cy="0"/>
+          <a:chOff x="0" y="0"/>
+          <a:chExt cx="0" cy="0"/>
+        </a:xfrm>
+      </p:grpSpPr>
+      <p:sp>
+        <p:nvSpPr>
+          <p:cNvPr id="3" name="Subtitle 2">
+            <a:extLst>
+              <a:ext uri="{FF2B5EF4-FFF2-40B4-BE49-F238E27FC236}">
+                <a16:creationId xmlns:a16="http://schemas.microsoft.com/office/drawing/2014/main" id="{58DC2991-F9D2-9CFB-D793-4BA25F7090F2}"/>
+              </a:ext>
+            </a:extLst>
+          </p:cNvPr>
+          <p:cNvSpPr>
+            <a:spLocks noGrp="1"/>
+          </p:cNvSpPr>
+          <p:nvPr>
+            <p:ph type="subTitle" idx="1"/>
+          </p:nvPr>
+        </p:nvSpPr>
+        <p:spPr>
+          <a:xfrm>
+            <a:off x="144379" y="228600"/>
+            <a:ext cx="8903369" cy="6431280"/>
+          </a:xfrm>
+        </p:spPr>
+        <p:txBody>
+          <a:bodyPr>
+            <a:noAutofit/>
+          </a:bodyPr>
+          <a:lstStyle/>
+          <a:p>
+            <a:endParaRPr lang="en-US" sz="4000" dirty="0">
+              <a:solidFill>
+                <a:schemeClr val="bg1"/>
+              </a:solidFill>
+              <a:latin typeface="Avenir Medium" panose="02000503020000020003" pitchFamily="2" charset="0"/>
+              <a:ea typeface="Bodoni Ornaments" pitchFamily="2" charset="0"/>
+            </a:endParaRPr>
+          </a:p>
+          <a:p>
+            <a:r>
+              <a:rPr lang="en-US" sz="4000" dirty="0">
+                <a:solidFill>
+                  <a:schemeClr val="bg1"/>
+                </a:solidFill>
+                <a:latin typeface="Avenir Medium" panose="02000503020000020003" pitchFamily="2" charset="0"/>
+                <a:ea typeface="Bodoni Ornaments" pitchFamily="2" charset="0"/>
+              </a:rPr>
+              <a:t>Show me who You are</a:t>
+            </a:r>
+          </a:p>
+          <a:p>
+            <a:r>
+              <a:rPr lang="en-US" sz="4000" dirty="0">
+                <a:solidFill>
+                  <a:schemeClr val="bg1"/>
+                </a:solidFill>
+                <a:latin typeface="Avenir Medium" panose="02000503020000020003" pitchFamily="2" charset="0"/>
+                <a:ea typeface="Bodoni Ornaments" pitchFamily="2" charset="0"/>
+              </a:rPr>
+              <a:t>And fill me with Your heart</a:t>
+            </a:r>
+          </a:p>
+          <a:p>
+            <a:r>
+              <a:rPr lang="en-US" sz="4000" dirty="0">
+                <a:solidFill>
+                  <a:schemeClr val="bg1"/>
+                </a:solidFill>
+                <a:latin typeface="Avenir Medium" panose="02000503020000020003" pitchFamily="2" charset="0"/>
+                <a:ea typeface="Bodoni Ornaments" pitchFamily="2" charset="0"/>
+              </a:rPr>
+              <a:t>And lead me in Your love</a:t>
+            </a:r>
+          </a:p>
+          <a:p>
+            <a:r>
+              <a:rPr lang="en-US" sz="4000" dirty="0">
+                <a:solidFill>
+                  <a:schemeClr val="bg1"/>
+                </a:solidFill>
+                <a:latin typeface="Avenir Medium" panose="02000503020000020003" pitchFamily="2" charset="0"/>
+                <a:ea typeface="Bodoni Ornaments" pitchFamily="2" charset="0"/>
+              </a:rPr>
+              <a:t>to those around me</a:t>
+            </a:r>
+          </a:p>
+          <a:p>
+            <a:endParaRPr lang="en-US" sz="4000" dirty="0">
+              <a:solidFill>
+                <a:schemeClr val="bg1"/>
+              </a:solidFill>
+              <a:latin typeface="Avenir Medium" panose="02000503020000020003" pitchFamily="2" charset="0"/>
+              <a:ea typeface="Bodoni Ornaments" pitchFamily="2" charset="0"/>
+            </a:endParaRPr>
+          </a:p>
+        </p:txBody>
+      </p:sp>
+      <p:sp>
+        <p:nvSpPr>
+          <p:cNvPr id="2" name="TextBox 1">
+            <a:extLst>
+              <a:ext uri="{FF2B5EF4-FFF2-40B4-BE49-F238E27FC236}">
+                <a16:creationId xmlns:a16="http://schemas.microsoft.com/office/drawing/2014/main" id="{74321CC9-4D81-5D07-75D6-20E941773423}"/>
+              </a:ext>
+            </a:extLst>
+          </p:cNvPr>
+          <p:cNvSpPr txBox="1"/>
+          <p:nvPr/>
+        </p:nvSpPr>
+        <p:spPr>
+          <a:xfrm>
+            <a:off x="7390614" y="6488668"/>
+            <a:ext cx="1753386" cy="369332"/>
+          </a:xfrm>
+          <a:prstGeom prst="rect">
+            <a:avLst/>
+          </a:prstGeom>
+          <a:noFill/>
+        </p:spPr>
+        <p:txBody>
+          <a:bodyPr wrap="square" rtlCol="0">
+            <a:spAutoFit/>
+          </a:bodyPr>
+          <a:lstStyle/>
+          <a:p>
+            <a:r>
+              <a:rPr lang="en-US" dirty="0">
+                <a:solidFill>
+                  <a:schemeClr val="bg1"/>
+                </a:solidFill>
+              </a:rPr>
+              <a:t>CCLI#7102397</a:t>
+            </a:r>
+          </a:p>
+        </p:txBody>
+      </p:sp>
+    </p:spTree>
+    <p:extLst>
+      <p:ext uri="{BB962C8B-B14F-4D97-AF65-F5344CB8AC3E}">
+        <p14:creationId xmlns:p14="http://schemas.microsoft.com/office/powerpoint/2010/main" val="1032078383"/>
+      </p:ext>
+    </p:extLst>
+  </p:cSld>
+  <p:clrMapOvr>
+    <a:masterClrMapping/>
+  </p:clrMapOvr>
+</p:sld>
+</file>
+
 <file path=ppt/slides/slide2.xml><?xml version="1.0" encoding="utf-8"?>
+<p:sld xmlns:a="http://schemas.openxmlformats.org/drawingml/2006/main" xmlns:r="http://schemas.openxmlformats.org/officeDocument/2006/relationships" xmlns:p="http://schemas.openxmlformats.org/presentationml/2006/main">
+  <p:cSld>
+    <p:bg>
+      <p:bgPr>
+        <a:solidFill>
+          <a:schemeClr val="tx1"/>
+        </a:solidFill>
+        <a:effectLst/>
+      </p:bgPr>
+    </p:bg>
+    <p:spTree>
+      <p:nvGrpSpPr>
+        <p:cNvPr id="1" name="">
+          <a:extLst>
+            <a:ext uri="{FF2B5EF4-FFF2-40B4-BE49-F238E27FC236}">
+              <a16:creationId xmlns:a16="http://schemas.microsoft.com/office/drawing/2014/main" id="{7119881B-6A98-3300-675D-079BD8D7CD88}"/>
+            </a:ext>
+          </a:extLst>
+        </p:cNvPr>
+        <p:cNvGrpSpPr/>
+        <p:nvPr/>
+      </p:nvGrpSpPr>
+      <p:grpSpPr>
+        <a:xfrm>
+          <a:off x="0" y="0"/>
+          <a:ext cx="0" cy="0"/>
+          <a:chOff x="0" y="0"/>
+          <a:chExt cx="0" cy="0"/>
+        </a:xfrm>
+      </p:grpSpPr>
+      <p:sp>
+        <p:nvSpPr>
+          <p:cNvPr id="3" name="Subtitle 2">
+            <a:extLst>
+              <a:ext uri="{FF2B5EF4-FFF2-40B4-BE49-F238E27FC236}">
+                <a16:creationId xmlns:a16="http://schemas.microsoft.com/office/drawing/2014/main" id="{B81B6CA4-EDB6-1218-7A78-FCB9F2B0E9AE}"/>
+              </a:ext>
+            </a:extLst>
+          </p:cNvPr>
+          <p:cNvSpPr>
+            <a:spLocks noGrp="1"/>
+          </p:cNvSpPr>
+          <p:nvPr>
+            <p:ph type="subTitle" idx="1"/>
+          </p:nvPr>
+        </p:nvSpPr>
+        <p:spPr>
+          <a:xfrm>
+            <a:off x="84221" y="213360"/>
+            <a:ext cx="8891337" cy="6416040"/>
+          </a:xfrm>
+        </p:spPr>
+        <p:txBody>
+          <a:bodyPr>
+            <a:noAutofit/>
+          </a:bodyPr>
+          <a:lstStyle/>
+          <a:p>
+            <a:endParaRPr lang="en-US" sz="4000" dirty="0">
+              <a:solidFill>
+                <a:schemeClr val="bg1"/>
+              </a:solidFill>
+              <a:latin typeface="Avenir Medium" panose="02000503020000020003" pitchFamily="2" charset="0"/>
+              <a:ea typeface="Bodoni Ornaments" pitchFamily="2" charset="0"/>
+            </a:endParaRPr>
+          </a:p>
+          <a:p>
+            <a:r>
+              <a:rPr lang="en-US" sz="4000" dirty="0">
+                <a:solidFill>
+                  <a:schemeClr val="bg1"/>
+                </a:solidFill>
+                <a:latin typeface="Avenir Medium" panose="02000503020000020003" pitchFamily="2" charset="0"/>
+                <a:ea typeface="Bodoni Ornaments" pitchFamily="2" charset="0"/>
+              </a:rPr>
+              <a:t>Worthy of every song </a:t>
+            </a:r>
+          </a:p>
+          <a:p>
+            <a:r>
+              <a:rPr lang="en-US" sz="4000" dirty="0">
+                <a:solidFill>
+                  <a:schemeClr val="bg1"/>
+                </a:solidFill>
+                <a:latin typeface="Avenir Medium" panose="02000503020000020003" pitchFamily="2" charset="0"/>
+                <a:ea typeface="Bodoni Ornaments" pitchFamily="2" charset="0"/>
+              </a:rPr>
+              <a:t>we could ever sing</a:t>
+            </a:r>
+          </a:p>
+          <a:p>
+            <a:r>
+              <a:rPr lang="en-US" sz="4000" dirty="0">
+                <a:solidFill>
+                  <a:schemeClr val="bg1"/>
+                </a:solidFill>
+                <a:latin typeface="Avenir Medium" panose="02000503020000020003" pitchFamily="2" charset="0"/>
+                <a:ea typeface="Bodoni Ornaments" pitchFamily="2" charset="0"/>
+              </a:rPr>
+              <a:t>Worthy of all the praise </a:t>
+            </a:r>
+          </a:p>
+          <a:p>
+            <a:r>
+              <a:rPr lang="en-US" sz="4000" dirty="0">
+                <a:solidFill>
+                  <a:schemeClr val="bg1"/>
+                </a:solidFill>
+                <a:latin typeface="Avenir Medium" panose="02000503020000020003" pitchFamily="2" charset="0"/>
+                <a:ea typeface="Bodoni Ornaments" pitchFamily="2" charset="0"/>
+              </a:rPr>
+              <a:t>we could ever bring</a:t>
+            </a:r>
+          </a:p>
+          <a:p>
+            <a:endParaRPr lang="en-US" sz="4000" dirty="0">
+              <a:solidFill>
+                <a:schemeClr val="bg1"/>
+              </a:solidFill>
+              <a:latin typeface="Avenir Medium" panose="02000503020000020003" pitchFamily="2" charset="0"/>
+              <a:ea typeface="Bodoni Ornaments" pitchFamily="2" charset="0"/>
+            </a:endParaRPr>
+          </a:p>
+        </p:txBody>
+      </p:sp>
+    </p:spTree>
+    <p:extLst>
+      <p:ext uri="{BB962C8B-B14F-4D97-AF65-F5344CB8AC3E}">
+        <p14:creationId xmlns:p14="http://schemas.microsoft.com/office/powerpoint/2010/main" val="1487955630"/>
+      </p:ext>
+    </p:extLst>
+  </p:cSld>
+  <p:clrMapOvr>
+    <a:masterClrMapping/>
+  </p:clrMapOvr>
+</p:sld>
+</file>
+
+<file path=ppt/slides/slide3.xml><?xml version="1.0" encoding="utf-8"?>
 <p:sld xmlns:a="http://schemas.openxmlformats.org/drawingml/2006/main" xmlns:r="http://schemas.openxmlformats.org/officeDocument/2006/relationships" xmlns:p="http://schemas.openxmlformats.org/presentationml/2006/main">
   <p:cSld>
     <p:bg>
@@ -3125,54 +4023,6 @@
                 <a:latin typeface="Avenir Medium" panose="02000503020000020003" pitchFamily="2" charset="0"/>
                 <a:ea typeface="Bodoni Ornaments" pitchFamily="2" charset="0"/>
               </a:rPr>
-              <a:t>Worthy of every song </a:t>
-            </a:r>
-          </a:p>
-          <a:p>
-            <a:r>
-              <a:rPr lang="en-US" sz="4000" dirty="0">
-                <a:solidFill>
-                  <a:schemeClr val="bg1"/>
-                </a:solidFill>
-                <a:latin typeface="Avenir Medium" panose="02000503020000020003" pitchFamily="2" charset="0"/>
-                <a:ea typeface="Bodoni Ornaments" pitchFamily="2" charset="0"/>
-              </a:rPr>
-              <a:t>we could ever sing</a:t>
-            </a:r>
-          </a:p>
-          <a:p>
-            <a:r>
-              <a:rPr lang="en-US" sz="4000" dirty="0">
-                <a:solidFill>
-                  <a:schemeClr val="bg1"/>
-                </a:solidFill>
-                <a:latin typeface="Avenir Medium" panose="02000503020000020003" pitchFamily="2" charset="0"/>
-                <a:ea typeface="Bodoni Ornaments" pitchFamily="2" charset="0"/>
-              </a:rPr>
-              <a:t>Worthy of all the praise </a:t>
-            </a:r>
-          </a:p>
-          <a:p>
-            <a:r>
-              <a:rPr lang="en-US" sz="4000" dirty="0">
-                <a:solidFill>
-                  <a:schemeClr val="bg1"/>
-                </a:solidFill>
-                <a:latin typeface="Avenir Medium" panose="02000503020000020003" pitchFamily="2" charset="0"/>
-                <a:ea typeface="Bodoni Ornaments" pitchFamily="2" charset="0"/>
-              </a:rPr>
-              <a:t>we could ever bring</a:t>
-            </a:r>
-          </a:p>
-          <a:p>
-            <a:r>
-              <a:rPr lang="en-US" sz="4000" dirty="0">
-                <a:solidFill>
-                  <a:schemeClr val="bg1"/>
-                </a:solidFill>
-                <a:latin typeface="Avenir Medium" panose="02000503020000020003" pitchFamily="2" charset="0"/>
-                <a:ea typeface="Bodoni Ornaments" pitchFamily="2" charset="0"/>
-              </a:rPr>
               <a:t>Worthy of every breath </a:t>
             </a:r>
           </a:p>
@@ -3236,7 +4086,7 @@
 </p:sld>
 </file>
 
-<file path=ppt/slides/slide3.xml><?xml version="1.0" encoding="utf-8"?>
+<file path=ppt/slides/slide4.xml><?xml version="1.0" encoding="utf-8"?>
 <p:sld xmlns:a="http://schemas.openxmlformats.org/drawingml/2006/main" xmlns:r="http://schemas.openxmlformats.org/officeDocument/2006/relationships" xmlns:p="http://schemas.openxmlformats.org/presentationml/2006/main">
   <p:cSld>
     <p:bg>
@@ -3351,54 +4201,6 @@
               <a:t>that could ever save</a:t>
             </a:r>
           </a:p>
-          <a:p>
-            <a:r>
-              <a:rPr lang="en-US" sz="4000" dirty="0">
-                <a:solidFill>
-                  <a:schemeClr val="bg1"/>
-                </a:solidFill>
-                <a:latin typeface="Avenir Medium" panose="02000503020000020003" pitchFamily="2" charset="0"/>
-                <a:ea typeface="Bodoni Ornaments" pitchFamily="2" charset="0"/>
-              </a:rPr>
-              <a:t>Worthy of every breath </a:t>
-            </a:r>
-          </a:p>
-          <a:p>
-            <a:r>
-              <a:rPr lang="en-US" sz="4000" dirty="0">
-                <a:solidFill>
-                  <a:schemeClr val="bg1"/>
-                </a:solidFill>
-                <a:latin typeface="Avenir Medium" panose="02000503020000020003" pitchFamily="2" charset="0"/>
-                <a:ea typeface="Bodoni Ornaments" pitchFamily="2" charset="0"/>
-              </a:rPr>
-              <a:t>we could ever breathe</a:t>
-            </a:r>
-          </a:p>
-          <a:p>
-            <a:r>
-              <a:rPr lang="en-US" sz="4000" dirty="0">
-                <a:solidFill>
-                  <a:schemeClr val="bg1"/>
-                </a:solidFill>
-                <a:latin typeface="Avenir Medium" panose="02000503020000020003" pitchFamily="2" charset="0"/>
-                <a:ea typeface="Bodoni Ornaments" pitchFamily="2" charset="0"/>
-              </a:rPr>
-              <a:t>We live for You</a:t>
-            </a:r>
-          </a:p>
-          <a:p>
-            <a:r>
-              <a:rPr lang="en-US" sz="4000" dirty="0">
-                <a:solidFill>
-                  <a:schemeClr val="bg1"/>
-                </a:solidFill>
-                <a:latin typeface="Avenir Medium" panose="02000503020000020003" pitchFamily="2" charset="0"/>
-                <a:ea typeface="Bodoni Ornaments" pitchFamily="2" charset="0"/>
-              </a:rPr>
-              <a:t>We live for You</a:t>
-            </a:r>
-          </a:p>
         </p:txBody>
       </p:sp>
     </p:spTree>
@@ -3414,7 +4216,137 @@
 </p:sld>
 </file>
 
-<file path=ppt/slides/slide4.xml><?xml version="1.0" encoding="utf-8"?>
+<file path=ppt/slides/slide5.xml><?xml version="1.0" encoding="utf-8"?>
+<p:sld xmlns:a="http://schemas.openxmlformats.org/drawingml/2006/main" xmlns:r="http://schemas.openxmlformats.org/officeDocument/2006/relationships" xmlns:p="http://schemas.openxmlformats.org/presentationml/2006/main">
+  <p:cSld>
+    <p:bg>
+      <p:bgPr>
+        <a:solidFill>
+          <a:schemeClr val="tx1"/>
+        </a:solidFill>
+        <a:effectLst/>
+      </p:bgPr>
+    </p:bg>
+    <p:spTree>
+      <p:nvGrpSpPr>
+        <p:cNvPr id="1" name="">
+          <a:extLst>
+            <a:ext uri="{FF2B5EF4-FFF2-40B4-BE49-F238E27FC236}">
+              <a16:creationId xmlns:a16="http://schemas.microsoft.com/office/drawing/2014/main" id="{E9AC345A-68EB-12C1-9343-57638A88CBE0}"/>
+            </a:ext>
+          </a:extLst>
+        </p:cNvPr>
+        <p:cNvGrpSpPr/>
+        <p:nvPr/>
+      </p:nvGrpSpPr>
+      <p:grpSpPr>
+        <a:xfrm>
+          <a:off x="0" y="0"/>
+          <a:ext cx="0" cy="0"/>
+          <a:chOff x="0" y="0"/>
+          <a:chExt cx="0" cy="0"/>
+        </a:xfrm>
+      </p:grpSpPr>
+      <p:sp>
+        <p:nvSpPr>
+          <p:cNvPr id="3" name="Subtitle 2">
+            <a:extLst>
+              <a:ext uri="{FF2B5EF4-FFF2-40B4-BE49-F238E27FC236}">
+                <a16:creationId xmlns:a16="http://schemas.microsoft.com/office/drawing/2014/main" id="{CEFE605C-B93E-1EE9-4719-94EA6946767C}"/>
+              </a:ext>
+            </a:extLst>
+          </p:cNvPr>
+          <p:cNvSpPr>
+            <a:spLocks noGrp="1"/>
+          </p:cNvSpPr>
+          <p:nvPr>
+            <p:ph type="subTitle" idx="1"/>
+          </p:nvPr>
+        </p:nvSpPr>
+        <p:spPr>
+          <a:xfrm>
+            <a:off x="144379" y="228600"/>
+            <a:ext cx="8903369" cy="6431280"/>
+          </a:xfrm>
+        </p:spPr>
+        <p:txBody>
+          <a:bodyPr>
+            <a:noAutofit/>
+          </a:bodyPr>
+          <a:lstStyle/>
+          <a:p>
+            <a:endParaRPr lang="en-US" sz="4000" dirty="0">
+              <a:solidFill>
+                <a:schemeClr val="bg1"/>
+              </a:solidFill>
+              <a:latin typeface="Avenir Medium" panose="02000503020000020003" pitchFamily="2" charset="0"/>
+              <a:ea typeface="Bodoni Ornaments" pitchFamily="2" charset="0"/>
+            </a:endParaRPr>
+          </a:p>
+          <a:p>
+            <a:r>
+              <a:rPr lang="en-US" sz="4000" dirty="0">
+                <a:solidFill>
+                  <a:schemeClr val="bg1"/>
+                </a:solidFill>
+                <a:latin typeface="Avenir Medium" panose="02000503020000020003" pitchFamily="2" charset="0"/>
+                <a:ea typeface="Bodoni Ornaments" pitchFamily="2" charset="0"/>
+              </a:rPr>
+              <a:t>Worthy of every breath </a:t>
+            </a:r>
+          </a:p>
+          <a:p>
+            <a:r>
+              <a:rPr lang="en-US" sz="4000" dirty="0">
+                <a:solidFill>
+                  <a:schemeClr val="bg1"/>
+                </a:solidFill>
+                <a:latin typeface="Avenir Medium" panose="02000503020000020003" pitchFamily="2" charset="0"/>
+                <a:ea typeface="Bodoni Ornaments" pitchFamily="2" charset="0"/>
+              </a:rPr>
+              <a:t>we could ever breathe</a:t>
+            </a:r>
+          </a:p>
+          <a:p>
+            <a:r>
+              <a:rPr lang="en-US" sz="4000" dirty="0">
+                <a:solidFill>
+                  <a:schemeClr val="bg1"/>
+                </a:solidFill>
+                <a:latin typeface="Avenir Medium" panose="02000503020000020003" pitchFamily="2" charset="0"/>
+                <a:ea typeface="Bodoni Ornaments" pitchFamily="2" charset="0"/>
+              </a:rPr>
+              <a:t>We live for You</a:t>
+            </a:r>
+          </a:p>
+          <a:p>
+            <a:r>
+              <a:rPr lang="en-US" sz="4000" dirty="0">
+                <a:solidFill>
+                  <a:schemeClr val="bg1"/>
+                </a:solidFill>
+                <a:latin typeface="Avenir Medium" panose="02000503020000020003" pitchFamily="2" charset="0"/>
+                <a:ea typeface="Bodoni Ornaments" pitchFamily="2" charset="0"/>
+              </a:rPr>
+              <a:t>We live for You</a:t>
+            </a:r>
+          </a:p>
+        </p:txBody>
+      </p:sp>
+    </p:spTree>
+    <p:extLst>
+      <p:ext uri="{BB962C8B-B14F-4D97-AF65-F5344CB8AC3E}">
+        <p14:creationId xmlns:p14="http://schemas.microsoft.com/office/powerpoint/2010/main" val="1321554989"/>
+      </p:ext>
+    </p:extLst>
+  </p:cSld>
+  <p:clrMapOvr>
+    <a:masterClrMapping/>
+  </p:clrMapOvr>
+</p:sld>
+</file>
+
+<file path=ppt/slides/slide6.xml><?xml version="1.0" encoding="utf-8"?>
 <p:sld xmlns:a="http://schemas.openxmlformats.org/drawingml/2006/main" xmlns:r="http://schemas.openxmlformats.org/officeDocument/2006/relationships" xmlns:p="http://schemas.openxmlformats.org/presentationml/2006/main">
   <p:cSld>
     <p:bg>
@@ -3518,54 +4450,6 @@
             </a:r>
           </a:p>
           <a:p>
-            <a:r>
-              <a:rPr lang="en-US" sz="4000" dirty="0">
-                <a:solidFill>
-                  <a:schemeClr val="bg1"/>
-                </a:solidFill>
-                <a:latin typeface="Avenir Medium" panose="02000503020000020003" pitchFamily="2" charset="0"/>
-                <a:ea typeface="Bodoni Ornaments" pitchFamily="2" charset="0"/>
-              </a:rPr>
-              <a:t>Show me who You are</a:t>
-            </a:r>
-          </a:p>
-          <a:p>
-            <a:r>
-              <a:rPr lang="en-US" sz="4000" dirty="0">
-                <a:solidFill>
-                  <a:schemeClr val="bg1"/>
-                </a:solidFill>
-                <a:latin typeface="Avenir Medium" panose="02000503020000020003" pitchFamily="2" charset="0"/>
-                <a:ea typeface="Bodoni Ornaments" pitchFamily="2" charset="0"/>
-              </a:rPr>
-              <a:t>And fill me with Your heart</a:t>
-            </a:r>
-          </a:p>
-          <a:p>
-            <a:r>
-              <a:rPr lang="en-US" sz="4000" dirty="0">
-                <a:solidFill>
-                  <a:schemeClr val="bg1"/>
-                </a:solidFill>
-                <a:latin typeface="Avenir Medium" panose="02000503020000020003" pitchFamily="2" charset="0"/>
-                <a:ea typeface="Bodoni Ornaments" pitchFamily="2" charset="0"/>
-              </a:rPr>
-              <a:t>And lead me in Your love</a:t>
-            </a:r>
-          </a:p>
-          <a:p>
-            <a:r>
-              <a:rPr lang="en-US" sz="4000" dirty="0">
-                <a:solidFill>
-                  <a:schemeClr val="bg1"/>
-                </a:solidFill>
-                <a:latin typeface="Avenir Medium" panose="02000503020000020003" pitchFamily="2" charset="0"/>
-                <a:ea typeface="Bodoni Ornaments" pitchFamily="2" charset="0"/>
-              </a:rPr>
-              <a:t>to those around me</a:t>
-            </a:r>
-          </a:p>
-          <a:p>
             <a:endParaRPr lang="en-US" sz="4000" dirty="0">
               <a:solidFill>
                 <a:schemeClr val="bg1"/>
@@ -3589,7 +4473,146 @@
 </p:sld>
 </file>
 
-<file path=ppt/slides/slide5.xml><?xml version="1.0" encoding="utf-8"?>
+<file path=ppt/slides/slide7.xml><?xml version="1.0" encoding="utf-8"?>
+<p:sld xmlns:a="http://schemas.openxmlformats.org/drawingml/2006/main" xmlns:r="http://schemas.openxmlformats.org/officeDocument/2006/relationships" xmlns:p="http://schemas.openxmlformats.org/presentationml/2006/main">
+  <p:cSld>
+    <p:bg>
+      <p:bgPr>
+        <a:solidFill>
+          <a:schemeClr val="tx1"/>
+        </a:solidFill>
+        <a:effectLst/>
+      </p:bgPr>
+    </p:bg>
+    <p:spTree>
+      <p:nvGrpSpPr>
+        <p:cNvPr id="1" name="">
+          <a:extLst>
+            <a:ext uri="{FF2B5EF4-FFF2-40B4-BE49-F238E27FC236}">
+              <a16:creationId xmlns:a16="http://schemas.microsoft.com/office/drawing/2014/main" id="{29CB6CE6-C1FB-70B7-6B5A-CF1F39667D67}"/>
+            </a:ext>
+          </a:extLst>
+        </p:cNvPr>
+        <p:cNvGrpSpPr/>
+        <p:nvPr/>
+      </p:nvGrpSpPr>
+      <p:grpSpPr>
+        <a:xfrm>
+          <a:off x="0" y="0"/>
+          <a:ext cx="0" cy="0"/>
+          <a:chOff x="0" y="0"/>
+          <a:chExt cx="0" cy="0"/>
+        </a:xfrm>
+      </p:grpSpPr>
+      <p:sp>
+        <p:nvSpPr>
+          <p:cNvPr id="3" name="Subtitle 2">
+            <a:extLst>
+              <a:ext uri="{FF2B5EF4-FFF2-40B4-BE49-F238E27FC236}">
+                <a16:creationId xmlns:a16="http://schemas.microsoft.com/office/drawing/2014/main" id="{AE2752A6-C439-CFED-91AC-B9982CDFA69F}"/>
+              </a:ext>
+            </a:extLst>
+          </p:cNvPr>
+          <p:cNvSpPr>
+            <a:spLocks noGrp="1"/>
+          </p:cNvSpPr>
+          <p:nvPr>
+            <p:ph type="subTitle" idx="1"/>
+          </p:nvPr>
+        </p:nvSpPr>
+        <p:spPr>
+          <a:xfrm>
+            <a:off x="144379" y="228600"/>
+            <a:ext cx="8903369" cy="6431280"/>
+          </a:xfrm>
+        </p:spPr>
+        <p:txBody>
+          <a:bodyPr>
+            <a:noAutofit/>
+          </a:bodyPr>
+          <a:lstStyle/>
+          <a:p>
+            <a:endParaRPr lang="en-US" sz="4000" dirty="0">
+              <a:solidFill>
+                <a:schemeClr val="bg1"/>
+              </a:solidFill>
+              <a:latin typeface="Avenir Medium" panose="02000503020000020003" pitchFamily="2" charset="0"/>
+              <a:ea typeface="Bodoni Ornaments" pitchFamily="2" charset="0"/>
+            </a:endParaRPr>
+          </a:p>
+          <a:p>
+            <a:r>
+              <a:rPr lang="en-US" sz="4000" dirty="0">
+                <a:solidFill>
+                  <a:schemeClr val="bg1"/>
+                </a:solidFill>
+                <a:latin typeface="Avenir Medium" panose="02000503020000020003" pitchFamily="2" charset="0"/>
+                <a:ea typeface="Bodoni Ornaments" pitchFamily="2" charset="0"/>
+              </a:rPr>
+              <a:t>Show me who You are</a:t>
+            </a:r>
+          </a:p>
+          <a:p>
+            <a:r>
+              <a:rPr lang="en-US" sz="4000" dirty="0">
+                <a:solidFill>
+                  <a:schemeClr val="bg1"/>
+                </a:solidFill>
+                <a:latin typeface="Avenir Medium" panose="02000503020000020003" pitchFamily="2" charset="0"/>
+                <a:ea typeface="Bodoni Ornaments" pitchFamily="2" charset="0"/>
+              </a:rPr>
+              <a:t>And fill me with Your heart</a:t>
+            </a:r>
+          </a:p>
+          <a:p>
+            <a:r>
+              <a:rPr lang="en-US" sz="4000" dirty="0">
+                <a:solidFill>
+                  <a:schemeClr val="bg1"/>
+                </a:solidFill>
+                <a:latin typeface="Avenir Medium" panose="02000503020000020003" pitchFamily="2" charset="0"/>
+                <a:ea typeface="Bodoni Ornaments" pitchFamily="2" charset="0"/>
+              </a:rPr>
+              <a:t>And lead me in Your love</a:t>
+            </a:r>
+          </a:p>
+          <a:p>
+            <a:r>
+              <a:rPr lang="en-US" sz="4000" dirty="0">
+                <a:solidFill>
+                  <a:schemeClr val="bg1"/>
+                </a:solidFill>
+                <a:latin typeface="Avenir Medium" panose="02000503020000020003" pitchFamily="2" charset="0"/>
+                <a:ea typeface="Bodoni Ornaments" pitchFamily="2" charset="0"/>
+              </a:rPr>
+              <a:t>to those around me</a:t>
+            </a:r>
+          </a:p>
+          <a:p>
+            <a:endParaRPr lang="en-US" sz="4000" dirty="0">
+              <a:solidFill>
+                <a:schemeClr val="bg1"/>
+              </a:solidFill>
+              <a:latin typeface="Avenir Medium" panose="02000503020000020003" pitchFamily="2" charset="0"/>
+              <a:ea typeface="Bodoni Ornaments" pitchFamily="2" charset="0"/>
+            </a:endParaRPr>
+          </a:p>
+        </p:txBody>
+      </p:sp>
+    </p:spTree>
+    <p:extLst>
+      <p:ext uri="{BB962C8B-B14F-4D97-AF65-F5344CB8AC3E}">
+        <p14:creationId xmlns:p14="http://schemas.microsoft.com/office/powerpoint/2010/main" val="3655659899"/>
+      </p:ext>
+    </p:extLst>
+  </p:cSld>
+  <p:clrMapOvr>
+    <a:masterClrMapping/>
+  </p:clrMapOvr>
+</p:sld>
+</file>
+
+<file path=ppt/slides/slide8.xml><?xml version="1.0" encoding="utf-8"?>
 <p:sld xmlns:a="http://schemas.openxmlformats.org/drawingml/2006/main" xmlns:r="http://schemas.openxmlformats.org/officeDocument/2006/relationships" xmlns:p="http://schemas.openxmlformats.org/presentationml/2006/main">
   <p:cSld>
     <p:bg>
@@ -3704,54 +4727,6 @@
               <a:t>that could ever save</a:t>
             </a:r>
           </a:p>
-          <a:p>
-            <a:r>
-              <a:rPr lang="en-US" sz="4000" dirty="0">
-                <a:solidFill>
-                  <a:schemeClr val="bg1"/>
-                </a:solidFill>
-                <a:latin typeface="Avenir Medium" panose="02000503020000020003" pitchFamily="2" charset="0"/>
-                <a:ea typeface="Bodoni Ornaments" pitchFamily="2" charset="0"/>
-              </a:rPr>
-              <a:t>Worthy of every breath </a:t>
-            </a:r>
-          </a:p>
-          <a:p>
-            <a:r>
-              <a:rPr lang="en-US" sz="4000" dirty="0">
-                <a:solidFill>
-                  <a:schemeClr val="bg1"/>
-                </a:solidFill>
-                <a:latin typeface="Avenir Medium" panose="02000503020000020003" pitchFamily="2" charset="0"/>
-                <a:ea typeface="Bodoni Ornaments" pitchFamily="2" charset="0"/>
-              </a:rPr>
-              <a:t>we could ever breathe</a:t>
-            </a:r>
-          </a:p>
-          <a:p>
-            <a:r>
-              <a:rPr lang="en-US" sz="4000" dirty="0">
-                <a:solidFill>
-                  <a:schemeClr val="bg1"/>
-                </a:solidFill>
-                <a:latin typeface="Avenir Medium" panose="02000503020000020003" pitchFamily="2" charset="0"/>
-                <a:ea typeface="Bodoni Ornaments" pitchFamily="2" charset="0"/>
-              </a:rPr>
-              <a:t>We live for You</a:t>
-            </a:r>
-          </a:p>
-          <a:p>
-            <a:r>
-              <a:rPr lang="en-US" sz="4000" dirty="0">
-                <a:solidFill>
-                  <a:schemeClr val="bg1"/>
-                </a:solidFill>
-                <a:latin typeface="Avenir Medium" panose="02000503020000020003" pitchFamily="2" charset="0"/>
-                <a:ea typeface="Bodoni Ornaments" pitchFamily="2" charset="0"/>
-              </a:rPr>
-              <a:t>We live for You</a:t>
-            </a:r>
-          </a:p>
         </p:txBody>
       </p:sp>
     </p:spTree>
@@ -3767,7 +4742,7 @@
 </p:sld>
 </file>
 
-<file path=ppt/slides/slide6.xml><?xml version="1.0" encoding="utf-8"?>
+<file path=ppt/slides/slide9.xml><?xml version="1.0" encoding="utf-8"?>
 <p:sld xmlns:a="http://schemas.openxmlformats.org/drawingml/2006/main" xmlns:r="http://schemas.openxmlformats.org/officeDocument/2006/relationships" xmlns:p="http://schemas.openxmlformats.org/presentationml/2006/main">
   <p:cSld>
     <p:bg>
@@ -3783,7 +4758,7 @@
         <p:cNvPr id="1" name="">
           <a:extLst>
             <a:ext uri="{FF2B5EF4-FFF2-40B4-BE49-F238E27FC236}">
-              <a16:creationId xmlns:a16="http://schemas.microsoft.com/office/drawing/2014/main" id="{B6B9810D-6BC3-0F63-D153-332B7E51D93E}"/>
+              <a16:creationId xmlns:a16="http://schemas.microsoft.com/office/drawing/2014/main" id="{8353ECAE-D798-4B80-7125-21650214C98C}"/>
             </a:ext>
           </a:extLst>
         </p:cNvPr>
@@ -3803,7 +4778,7 @@
           <p:cNvPr id="3" name="Subtitle 2">
             <a:extLst>
               <a:ext uri="{FF2B5EF4-FFF2-40B4-BE49-F238E27FC236}">
-                <a16:creationId xmlns:a16="http://schemas.microsoft.com/office/drawing/2014/main" id="{AF98F530-F40F-0DEF-A053-08666EEA3A7C}"/>
+                <a16:creationId xmlns:a16="http://schemas.microsoft.com/office/drawing/2014/main" id="{FF9FAE97-556F-2EF3-3CAA-B74A4F8C49D1}"/>
               </a:ext>
             </a:extLst>
           </p:cNvPr>
@@ -3843,7 +4818,7 @@
                 <a:latin typeface="Avenir Medium" panose="02000503020000020003" pitchFamily="2" charset="0"/>
                 <a:ea typeface="Bodoni Ornaments" pitchFamily="2" charset="0"/>
               </a:rPr>
-              <a:t>Holy there is no one like You </a:t>
+              <a:t>Worthy of every breath </a:t>
             </a:r>
           </a:p>
           <a:p>
@@ -3855,7 +4830,7 @@
                 <a:latin typeface="Avenir Medium" panose="02000503020000020003" pitchFamily="2" charset="0"/>
                 <a:ea typeface="Bodoni Ornaments" pitchFamily="2" charset="0"/>
               </a:rPr>
-              <a:t>There is none beside You</a:t>
+              <a:t>we could ever breathe</a:t>
             </a:r>
           </a:p>
           <a:p>
@@ -3867,7 +4842,7 @@
                 <a:latin typeface="Avenir Medium" panose="02000503020000020003" pitchFamily="2" charset="0"/>
                 <a:ea typeface="Bodoni Ornaments" pitchFamily="2" charset="0"/>
               </a:rPr>
-              <a:t>Open up my eyes in wonder </a:t>
+              <a:t>We live for You</a:t>
             </a:r>
           </a:p>
           <a:p>
@@ -3879,437 +4854,15 @@
                 <a:latin typeface="Avenir Medium" panose="02000503020000020003" pitchFamily="2" charset="0"/>
                 <a:ea typeface="Bodoni Ornaments" pitchFamily="2" charset="0"/>
               </a:rPr>
-              <a:t>Show me who You are</a:t>
-            </a:r>
-          </a:p>
-          <a:p>
-            <a:r>
-              <a:rPr lang="en-US" sz="4000" dirty="0">
-                <a:solidFill>
-                  <a:schemeClr val="bg1"/>
-                </a:solidFill>
-                <a:latin typeface="Avenir Medium" panose="02000503020000020003" pitchFamily="2" charset="0"/>
-                <a:ea typeface="Bodoni Ornaments" pitchFamily="2" charset="0"/>
-              </a:rPr>
-              <a:t>And fill me with Your heart</a:t>
-            </a:r>
-          </a:p>
-          <a:p>
-            <a:r>
-              <a:rPr lang="en-US" sz="4000" dirty="0">
-                <a:solidFill>
-                  <a:schemeClr val="bg1"/>
-                </a:solidFill>
-                <a:latin typeface="Avenir Medium" panose="02000503020000020003" pitchFamily="2" charset="0"/>
-                <a:ea typeface="Bodoni Ornaments" pitchFamily="2" charset="0"/>
-              </a:rPr>
-              <a:t>And lead me in Your love</a:t>
-            </a:r>
-          </a:p>
-          <a:p>
-            <a:r>
-              <a:rPr lang="en-US" sz="4000" dirty="0">
-                <a:solidFill>
-                  <a:schemeClr val="bg1"/>
-                </a:solidFill>
-                <a:latin typeface="Avenir Medium" panose="02000503020000020003" pitchFamily="2" charset="0"/>
-                <a:ea typeface="Bodoni Ornaments" pitchFamily="2" charset="0"/>
-              </a:rPr>
-              <a:t>to those around me</a:t>
-            </a:r>
-          </a:p>
-          <a:p>
-            <a:endParaRPr lang="en-US" sz="4000" dirty="0">
-              <a:solidFill>
-                <a:schemeClr val="bg1"/>
-              </a:solidFill>
-              <a:latin typeface="Avenir Medium" panose="02000503020000020003" pitchFamily="2" charset="0"/>
-              <a:ea typeface="Bodoni Ornaments" pitchFamily="2" charset="0"/>
-            </a:endParaRPr>
+              <a:t>We live for You</a:t>
+            </a:r>
           </a:p>
         </p:txBody>
       </p:sp>
     </p:spTree>
     <p:extLst>
       <p:ext uri="{BB962C8B-B14F-4D97-AF65-F5344CB8AC3E}">
-        <p14:creationId xmlns:p14="http://schemas.microsoft.com/office/powerpoint/2010/main" val="2497629168"/>
-      </p:ext>
-    </p:extLst>
-  </p:cSld>
-  <p:clrMapOvr>
-    <a:masterClrMapping/>
-  </p:clrMapOvr>
-</p:sld>
-</file>
-
-<file path=ppt/slides/slide7.xml><?xml version="1.0" encoding="utf-8"?>
-<p:sld xmlns:a="http://schemas.openxmlformats.org/drawingml/2006/main" xmlns:r="http://schemas.openxmlformats.org/officeDocument/2006/relationships" xmlns:p="http://schemas.openxmlformats.org/presentationml/2006/main">
-  <p:cSld>
-    <p:bg>
-      <p:bgPr>
-        <a:solidFill>
-          <a:schemeClr val="tx1"/>
-        </a:solidFill>
-        <a:effectLst/>
-      </p:bgPr>
-    </p:bg>
-    <p:spTree>
-      <p:nvGrpSpPr>
-        <p:cNvPr id="1" name="">
-          <a:extLst>
-            <a:ext uri="{FF2B5EF4-FFF2-40B4-BE49-F238E27FC236}">
-              <a16:creationId xmlns:a16="http://schemas.microsoft.com/office/drawing/2014/main" id="{F0F59531-CDDD-0EAF-CCC9-10BF02E4EEA3}"/>
-            </a:ext>
-          </a:extLst>
-        </p:cNvPr>
-        <p:cNvGrpSpPr/>
-        <p:nvPr/>
-      </p:nvGrpSpPr>
-      <p:grpSpPr>
-        <a:xfrm>
-          <a:off x="0" y="0"/>
-          <a:ext cx="0" cy="0"/>
-          <a:chOff x="0" y="0"/>
-          <a:chExt cx="0" cy="0"/>
-        </a:xfrm>
-      </p:grpSpPr>
-      <p:sp>
-        <p:nvSpPr>
-          <p:cNvPr id="3" name="Subtitle 2">
-            <a:extLst>
-              <a:ext uri="{FF2B5EF4-FFF2-40B4-BE49-F238E27FC236}">
-                <a16:creationId xmlns:a16="http://schemas.microsoft.com/office/drawing/2014/main" id="{5C6F3413-02E2-6B03-81F0-64323C17CF88}"/>
-              </a:ext>
-            </a:extLst>
-          </p:cNvPr>
-          <p:cNvSpPr>
-            <a:spLocks noGrp="1"/>
-          </p:cNvSpPr>
-          <p:nvPr>
-            <p:ph type="subTitle" idx="1"/>
-          </p:nvPr>
-        </p:nvSpPr>
-        <p:spPr>
-          <a:xfrm>
-            <a:off x="144379" y="228600"/>
-            <a:ext cx="8903369" cy="6431280"/>
-          </a:xfrm>
-        </p:spPr>
-        <p:txBody>
-          <a:bodyPr>
-            <a:noAutofit/>
-          </a:bodyPr>
-          <a:lstStyle/>
-          <a:p>
-            <a:endParaRPr lang="en-US" sz="4000" dirty="0">
-              <a:solidFill>
-                <a:schemeClr val="bg1"/>
-              </a:solidFill>
-              <a:latin typeface="Avenir Medium" panose="02000503020000020003" pitchFamily="2" charset="0"/>
-              <a:ea typeface="Bodoni Ornaments" pitchFamily="2" charset="0"/>
-            </a:endParaRPr>
-          </a:p>
-          <a:p>
-            <a:r>
-              <a:rPr lang="en-US" sz="4000" dirty="0">
-                <a:solidFill>
-                  <a:schemeClr val="bg1"/>
-                </a:solidFill>
-                <a:latin typeface="Avenir Medium" panose="02000503020000020003" pitchFamily="2" charset="0"/>
-                <a:ea typeface="Bodoni Ornaments" pitchFamily="2" charset="0"/>
-              </a:rPr>
-              <a:t>I will build my life, </a:t>
-            </a:r>
-          </a:p>
-          <a:p>
-            <a:r>
-              <a:rPr lang="en-US" sz="4000" dirty="0">
-                <a:solidFill>
-                  <a:schemeClr val="bg1"/>
-                </a:solidFill>
-                <a:latin typeface="Avenir Medium" panose="02000503020000020003" pitchFamily="2" charset="0"/>
-                <a:ea typeface="Bodoni Ornaments" pitchFamily="2" charset="0"/>
-              </a:rPr>
-              <a:t>upon Your love</a:t>
-            </a:r>
-          </a:p>
-          <a:p>
-            <a:r>
-              <a:rPr lang="en-US" sz="4000" dirty="0">
-                <a:solidFill>
-                  <a:schemeClr val="bg1"/>
-                </a:solidFill>
-                <a:latin typeface="Avenir Medium" panose="02000503020000020003" pitchFamily="2" charset="0"/>
-                <a:ea typeface="Bodoni Ornaments" pitchFamily="2" charset="0"/>
-              </a:rPr>
-              <a:t>It is a firm foundation</a:t>
-            </a:r>
-          </a:p>
-          <a:p>
-            <a:r>
-              <a:rPr lang="en-US" sz="4000" dirty="0">
-                <a:solidFill>
-                  <a:schemeClr val="bg1"/>
-                </a:solidFill>
-                <a:latin typeface="Avenir Medium" panose="02000503020000020003" pitchFamily="2" charset="0"/>
-                <a:ea typeface="Bodoni Ornaments" pitchFamily="2" charset="0"/>
-              </a:rPr>
-              <a:t>I will put my trust, </a:t>
-            </a:r>
-          </a:p>
-          <a:p>
-            <a:r>
-              <a:rPr lang="en-US" sz="4000" dirty="0">
-                <a:solidFill>
-                  <a:schemeClr val="bg1"/>
-                </a:solidFill>
-                <a:latin typeface="Avenir Medium" panose="02000503020000020003" pitchFamily="2" charset="0"/>
-                <a:ea typeface="Bodoni Ornaments" pitchFamily="2" charset="0"/>
-              </a:rPr>
-              <a:t>in You alone</a:t>
-            </a:r>
-          </a:p>
-          <a:p>
-            <a:r>
-              <a:rPr lang="en-US" sz="4000" dirty="0">
-                <a:solidFill>
-                  <a:schemeClr val="bg1"/>
-                </a:solidFill>
-                <a:latin typeface="Avenir Medium" panose="02000503020000020003" pitchFamily="2" charset="0"/>
-                <a:ea typeface="Bodoni Ornaments" pitchFamily="2" charset="0"/>
-              </a:rPr>
-              <a:t>And I will not be shaken</a:t>
-            </a:r>
-          </a:p>
-          <a:p>
-            <a:endParaRPr lang="en-US" sz="4000" dirty="0">
-              <a:solidFill>
-                <a:schemeClr val="bg1"/>
-              </a:solidFill>
-              <a:latin typeface="Avenir Medium" panose="02000503020000020003" pitchFamily="2" charset="0"/>
-              <a:ea typeface="Bodoni Ornaments" pitchFamily="2" charset="0"/>
-            </a:endParaRPr>
-          </a:p>
-        </p:txBody>
-      </p:sp>
-    </p:spTree>
-    <p:extLst>
-      <p:ext uri="{BB962C8B-B14F-4D97-AF65-F5344CB8AC3E}">
-        <p14:creationId xmlns:p14="http://schemas.microsoft.com/office/powerpoint/2010/main" val="3710739980"/>
-      </p:ext>
-    </p:extLst>
-  </p:cSld>
-  <p:clrMapOvr>
-    <a:masterClrMapping/>
-  </p:clrMapOvr>
-</p:sld>
-</file>
-
-<file path=ppt/slides/slide8.xml><?xml version="1.0" encoding="utf-8"?>
-<p:sld xmlns:a="http://schemas.openxmlformats.org/drawingml/2006/main" xmlns:r="http://schemas.openxmlformats.org/officeDocument/2006/relationships" xmlns:p="http://schemas.openxmlformats.org/presentationml/2006/main">
-  <p:cSld>
-    <p:bg>
-      <p:bgPr>
-        <a:solidFill>
-          <a:schemeClr val="tx1"/>
-        </a:solidFill>
-        <a:effectLst/>
-      </p:bgPr>
-    </p:bg>
-    <p:spTree>
-      <p:nvGrpSpPr>
-        <p:cNvPr id="1" name="">
-          <a:extLst>
-            <a:ext uri="{FF2B5EF4-FFF2-40B4-BE49-F238E27FC236}">
-              <a16:creationId xmlns:a16="http://schemas.microsoft.com/office/drawing/2014/main" id="{09FE3482-87DC-3DFB-7F79-AFC99C063F9D}"/>
-            </a:ext>
-          </a:extLst>
-        </p:cNvPr>
-        <p:cNvGrpSpPr/>
-        <p:nvPr/>
-      </p:nvGrpSpPr>
-      <p:grpSpPr>
-        <a:xfrm>
-          <a:off x="0" y="0"/>
-          <a:ext cx="0" cy="0"/>
-          <a:chOff x="0" y="0"/>
-          <a:chExt cx="0" cy="0"/>
-        </a:xfrm>
-      </p:grpSpPr>
-      <p:sp>
-        <p:nvSpPr>
-          <p:cNvPr id="3" name="Subtitle 2">
-            <a:extLst>
-              <a:ext uri="{FF2B5EF4-FFF2-40B4-BE49-F238E27FC236}">
-                <a16:creationId xmlns:a16="http://schemas.microsoft.com/office/drawing/2014/main" id="{C2B0BE8B-CA1B-386F-B226-637B81EBBF41}"/>
-              </a:ext>
-            </a:extLst>
-          </p:cNvPr>
-          <p:cNvSpPr>
-            <a:spLocks noGrp="1"/>
-          </p:cNvSpPr>
-          <p:nvPr>
-            <p:ph type="subTitle" idx="1"/>
-          </p:nvPr>
-        </p:nvSpPr>
-        <p:spPr>
-          <a:xfrm>
-            <a:off x="144379" y="228600"/>
-            <a:ext cx="8903369" cy="6431280"/>
-          </a:xfrm>
-        </p:spPr>
-        <p:txBody>
-          <a:bodyPr>
-            <a:noAutofit/>
-          </a:bodyPr>
-          <a:lstStyle/>
-          <a:p>
-            <a:endParaRPr lang="en-US" sz="4000" dirty="0">
-              <a:solidFill>
-                <a:schemeClr val="bg1"/>
-              </a:solidFill>
-              <a:latin typeface="Avenir Medium" panose="02000503020000020003" pitchFamily="2" charset="0"/>
-              <a:ea typeface="Bodoni Ornaments" pitchFamily="2" charset="0"/>
-            </a:endParaRPr>
-          </a:p>
-          <a:p>
-            <a:r>
-              <a:rPr lang="en-US" sz="4000" dirty="0">
-                <a:solidFill>
-                  <a:schemeClr val="bg1"/>
-                </a:solidFill>
-                <a:latin typeface="Avenir Medium" panose="02000503020000020003" pitchFamily="2" charset="0"/>
-                <a:ea typeface="Bodoni Ornaments" pitchFamily="2" charset="0"/>
-              </a:rPr>
-              <a:t>Holy there is no one like You </a:t>
-            </a:r>
-          </a:p>
-          <a:p>
-            <a:r>
-              <a:rPr lang="en-US" sz="4000" dirty="0">
-                <a:solidFill>
-                  <a:schemeClr val="bg1"/>
-                </a:solidFill>
-                <a:latin typeface="Avenir Medium" panose="02000503020000020003" pitchFamily="2" charset="0"/>
-                <a:ea typeface="Bodoni Ornaments" pitchFamily="2" charset="0"/>
-              </a:rPr>
-              <a:t>There is none beside You</a:t>
-            </a:r>
-          </a:p>
-          <a:p>
-            <a:r>
-              <a:rPr lang="en-US" sz="4000" dirty="0">
-                <a:solidFill>
-                  <a:schemeClr val="bg1"/>
-                </a:solidFill>
-                <a:latin typeface="Avenir Medium" panose="02000503020000020003" pitchFamily="2" charset="0"/>
-                <a:ea typeface="Bodoni Ornaments" pitchFamily="2" charset="0"/>
-              </a:rPr>
-              <a:t>Open up my eyes in wonder </a:t>
-            </a:r>
-          </a:p>
-          <a:p>
-            <a:r>
-              <a:rPr lang="en-US" sz="4000" dirty="0">
-                <a:solidFill>
-                  <a:schemeClr val="bg1"/>
-                </a:solidFill>
-                <a:latin typeface="Avenir Medium" panose="02000503020000020003" pitchFamily="2" charset="0"/>
-                <a:ea typeface="Bodoni Ornaments" pitchFamily="2" charset="0"/>
-              </a:rPr>
-              <a:t>Show me who You are</a:t>
-            </a:r>
-          </a:p>
-          <a:p>
-            <a:r>
-              <a:rPr lang="en-US" sz="4000" dirty="0">
-                <a:solidFill>
-                  <a:schemeClr val="bg1"/>
-                </a:solidFill>
-                <a:latin typeface="Avenir Medium" panose="02000503020000020003" pitchFamily="2" charset="0"/>
-                <a:ea typeface="Bodoni Ornaments" pitchFamily="2" charset="0"/>
-              </a:rPr>
-              <a:t>And fill me with Your heart</a:t>
-            </a:r>
-          </a:p>
-          <a:p>
-            <a:r>
-              <a:rPr lang="en-US" sz="4000" dirty="0">
-                <a:solidFill>
-                  <a:schemeClr val="bg1"/>
-                </a:solidFill>
-                <a:latin typeface="Avenir Medium" panose="02000503020000020003" pitchFamily="2" charset="0"/>
-                <a:ea typeface="Bodoni Ornaments" pitchFamily="2" charset="0"/>
-              </a:rPr>
-              <a:t>And lead me in Your love</a:t>
-            </a:r>
-          </a:p>
-          <a:p>
-            <a:r>
-              <a:rPr lang="en-US" sz="4000" dirty="0">
-                <a:solidFill>
-                  <a:schemeClr val="bg1"/>
-                </a:solidFill>
-                <a:latin typeface="Avenir Medium" panose="02000503020000020003" pitchFamily="2" charset="0"/>
-                <a:ea typeface="Bodoni Ornaments" pitchFamily="2" charset="0"/>
-              </a:rPr>
-              <a:t>to those around me</a:t>
-            </a:r>
-          </a:p>
-          <a:p>
-            <a:endParaRPr lang="en-US" sz="4000" dirty="0">
-              <a:solidFill>
-                <a:schemeClr val="bg1"/>
-              </a:solidFill>
-              <a:latin typeface="Avenir Medium" panose="02000503020000020003" pitchFamily="2" charset="0"/>
-              <a:ea typeface="Bodoni Ornaments" pitchFamily="2" charset="0"/>
-            </a:endParaRPr>
-          </a:p>
-        </p:txBody>
-      </p:sp>
-      <p:sp>
-        <p:nvSpPr>
-          <p:cNvPr id="2" name="TextBox 1">
-            <a:extLst>
-              <a:ext uri="{FF2B5EF4-FFF2-40B4-BE49-F238E27FC236}">
-                <a16:creationId xmlns:a16="http://schemas.microsoft.com/office/drawing/2014/main" id="{B5096649-0FD7-C8A4-FF95-26CE424F1DF5}"/>
-              </a:ext>
-            </a:extLst>
-          </p:cNvPr>
-          <p:cNvSpPr txBox="1"/>
-          <p:nvPr/>
-        </p:nvSpPr>
-        <p:spPr>
-          <a:xfrm>
-            <a:off x="7390614" y="6488668"/>
-            <a:ext cx="1753386" cy="369332"/>
-          </a:xfrm>
-          <a:prstGeom prst="rect">
-            <a:avLst/>
-          </a:prstGeom>
-          <a:noFill/>
-        </p:spPr>
-        <p:txBody>
-          <a:bodyPr wrap="square" rtlCol="0">
-            <a:spAutoFit/>
-          </a:bodyPr>
-          <a:lstStyle/>
-          <a:p>
-            <a:r>
-              <a:rPr lang="en-US" dirty="0">
-                <a:solidFill>
-                  <a:schemeClr val="bg1"/>
-                </a:solidFill>
-              </a:rPr>
-              <a:t>CCLI#7102397</a:t>
-            </a:r>
-          </a:p>
-        </p:txBody>
-      </p:sp>
-    </p:spTree>
-    <p:extLst>
-      <p:ext uri="{BB962C8B-B14F-4D97-AF65-F5344CB8AC3E}">
-        <p14:creationId xmlns:p14="http://schemas.microsoft.com/office/powerpoint/2010/main" val="2273843662"/>
+        <p14:creationId xmlns:p14="http://schemas.microsoft.com/office/powerpoint/2010/main" val="2696135455"/>
       </p:ext>
     </p:extLst>
   </p:cSld>

--- a/Build My Life.pptx
+++ b/Build My Life.pptx
@@ -256,7 +256,7 @@
           <a:p>
             <a:fld id="{E759A0DE-F190-5444-87AC-4719D5F20D15}" type="datetimeFigureOut">
               <a:rPr lang="en-US" smtClean="0"/>
-              <a:t>6/20/26</a:t>
+              <a:t>7/25/26</a:t>
             </a:fld>
             <a:endParaRPr lang="en-US"/>
           </a:p>
@@ -426,7 +426,7 @@
           <a:p>
             <a:fld id="{E759A0DE-F190-5444-87AC-4719D5F20D15}" type="datetimeFigureOut">
               <a:rPr lang="en-US" smtClean="0"/>
-              <a:t>6/20/26</a:t>
+              <a:t>7/25/26</a:t>
             </a:fld>
             <a:endParaRPr lang="en-US"/>
           </a:p>
@@ -606,7 +606,7 @@
           <a:p>
             <a:fld id="{E759A0DE-F190-5444-87AC-4719D5F20D15}" type="datetimeFigureOut">
               <a:rPr lang="en-US" smtClean="0"/>
-              <a:t>6/20/26</a:t>
+              <a:t>7/25/26</a:t>
             </a:fld>
             <a:endParaRPr lang="en-US"/>
           </a:p>
@@ -776,7 +776,7 @@
           <a:p>
             <a:fld id="{E759A0DE-F190-5444-87AC-4719D5F20D15}" type="datetimeFigureOut">
               <a:rPr lang="en-US" smtClean="0"/>
-              <a:t>6/20/26</a:t>
+              <a:t>7/25/26</a:t>
             </a:fld>
             <a:endParaRPr lang="en-US"/>
           </a:p>
@@ -1022,7 +1022,7 @@
           <a:p>
             <a:fld id="{E759A0DE-F190-5444-87AC-4719D5F20D15}" type="datetimeFigureOut">
               <a:rPr lang="en-US" smtClean="0"/>
-              <a:t>6/20/26</a:t>
+              <a:t>7/25/26</a:t>
             </a:fld>
             <a:endParaRPr lang="en-US"/>
           </a:p>
@@ -1254,7 +1254,7 @@
           <a:p>
             <a:fld id="{E759A0DE-F190-5444-87AC-4719D5F20D15}" type="datetimeFigureOut">
               <a:rPr lang="en-US" smtClean="0"/>
-              <a:t>6/20/26</a:t>
+              <a:t>7/25/26</a:t>
             </a:fld>
             <a:endParaRPr lang="en-US"/>
           </a:p>
@@ -1621,7 +1621,7 @@
           <a:p>
             <a:fld id="{E759A0DE-F190-5444-87AC-4719D5F20D15}" type="datetimeFigureOut">
               <a:rPr lang="en-US" smtClean="0"/>
-              <a:t>6/20/26</a:t>
+              <a:t>7/25/26</a:t>
             </a:fld>
             <a:endParaRPr lang="en-US"/>
           </a:p>
@@ -1739,7 +1739,7 @@
           <a:p>
             <a:fld id="{E759A0DE-F190-5444-87AC-4719D5F20D15}" type="datetimeFigureOut">
               <a:rPr lang="en-US" smtClean="0"/>
-              <a:t>6/20/26</a:t>
+              <a:t>7/25/26</a:t>
             </a:fld>
             <a:endParaRPr lang="en-US"/>
           </a:p>
@@ -1834,7 +1834,7 @@
           <a:p>
             <a:fld id="{E759A0DE-F190-5444-87AC-4719D5F20D15}" type="datetimeFigureOut">
               <a:rPr lang="en-US" smtClean="0"/>
-              <a:t>6/20/26</a:t>
+              <a:t>7/25/26</a:t>
             </a:fld>
             <a:endParaRPr lang="en-US"/>
           </a:p>
@@ -2111,7 +2111,7 @@
           <a:p>
             <a:fld id="{E759A0DE-F190-5444-87AC-4719D5F20D15}" type="datetimeFigureOut">
               <a:rPr lang="en-US" smtClean="0"/>
-              <a:t>6/20/26</a:t>
+              <a:t>7/25/26</a:t>
             </a:fld>
             <a:endParaRPr lang="en-US"/>
           </a:p>
@@ -2368,7 +2368,7 @@
           <a:p>
             <a:fld id="{E759A0DE-F190-5444-87AC-4719D5F20D15}" type="datetimeFigureOut">
               <a:rPr lang="en-US" smtClean="0"/>
-              <a:t>6/20/26</a:t>
+              <a:t>7/25/26</a:t>
             </a:fld>
             <a:endParaRPr lang="en-US"/>
           </a:p>
@@ -2581,7 +2581,7 @@
           <a:p>
             <a:fld id="{E759A0DE-F190-5444-87AC-4719D5F20D15}" type="datetimeFigureOut">
               <a:rPr lang="en-US" smtClean="0"/>
-              <a:t>6/20/26</a:t>
+              <a:t>7/25/26</a:t>
             </a:fld>
             <a:endParaRPr lang="en-US"/>
           </a:p>
@@ -3042,6 +3042,245 @@
           </a:p>
         </p:txBody>
       </p:sp>
+      <p:sp>
+        <p:nvSpPr>
+          <p:cNvPr id="2" name="TextBox 1">
+            <a:extLst>
+              <a:ext uri="{FF2B5EF4-FFF2-40B4-BE49-F238E27FC236}">
+                <a16:creationId xmlns:a16="http://schemas.microsoft.com/office/drawing/2014/main" id="{5023BD53-E4D4-53C5-70F5-FE964F155C47}"/>
+              </a:ext>
+            </a:extLst>
+          </p:cNvPr>
+          <p:cNvSpPr txBox="1"/>
+          <p:nvPr/>
+        </p:nvSpPr>
+        <p:spPr>
+          <a:xfrm>
+            <a:off x="168442" y="5444311"/>
+            <a:ext cx="8807115" cy="1477328"/>
+          </a:xfrm>
+          <a:prstGeom prst="rect">
+            <a:avLst/>
+          </a:prstGeom>
+          <a:noFill/>
+        </p:spPr>
+        <p:txBody>
+          <a:bodyPr wrap="square" rtlCol="0">
+            <a:spAutoFit/>
+          </a:bodyPr>
+          <a:lstStyle/>
+          <a:p>
+            <a:pPr marL="0" marR="0" lvl="0" indent="0" algn="ctr" defTabSz="457200" rtl="0" eaLnBrk="1" fontAlgn="auto" latinLnBrk="0" hangingPunct="1">
+              <a:lnSpc>
+                <a:spcPct val="100000"/>
+              </a:lnSpc>
+              <a:spcBef>
+                <a:spcPts val="0"/>
+              </a:spcBef>
+              <a:spcAft>
+                <a:spcPts val="0"/>
+              </a:spcAft>
+              <a:buClrTx/>
+              <a:buSzTx/>
+              <a:buFontTx/>
+              <a:buNone/>
+              <a:tabLst/>
+              <a:defRPr/>
+            </a:pPr>
+            <a:r>
+              <a:rPr kumimoji="0" lang="en-US" sz="1800" b="0" i="0" u="none" strike="noStrike" kern="1200" cap="none" spc="0" normalizeH="0" baseline="0" noProof="0" dirty="0">
+                <a:ln>
+                  <a:noFill/>
+                </a:ln>
+                <a:solidFill>
+                  <a:prstClr val="white"/>
+                </a:solidFill>
+                <a:effectLst/>
+                <a:uLnTx/>
+                <a:uFillTx/>
+                <a:latin typeface="Aptos" panose="02110004020202020204"/>
+                <a:ea typeface="+mn-ea"/>
+                <a:cs typeface="+mn-cs"/>
+              </a:rPr>
+              <a:t>Words &amp; Musci Brett Younker, Karl Martin, Kirby Kaple, Matt Redman, Pat Barrett (2016)</a:t>
+            </a:r>
+          </a:p>
+          <a:p>
+            <a:pPr marL="0" marR="0" lvl="0" indent="0" algn="ctr" defTabSz="457200" rtl="0" eaLnBrk="1" fontAlgn="auto" latinLnBrk="0" hangingPunct="1">
+              <a:lnSpc>
+                <a:spcPct val="100000"/>
+              </a:lnSpc>
+              <a:spcBef>
+                <a:spcPts val="0"/>
+              </a:spcBef>
+              <a:spcAft>
+                <a:spcPts val="0"/>
+              </a:spcAft>
+              <a:buClrTx/>
+              <a:buSzTx/>
+              <a:buFontTx/>
+              <a:buNone/>
+              <a:tabLst/>
+              <a:defRPr/>
+            </a:pPr>
+            <a:r>
+              <a:rPr kumimoji="0" lang="en-US" sz="1800" b="0" i="0" u="none" strike="noStrike" kern="1200" cap="none" spc="0" normalizeH="0" baseline="0" noProof="0" dirty="0">
+                <a:ln>
+                  <a:noFill/>
+                </a:ln>
+                <a:solidFill>
+                  <a:prstClr val="white"/>
+                </a:solidFill>
+                <a:effectLst/>
+                <a:uLnTx/>
+                <a:uFillTx/>
+                <a:latin typeface="Aptos" panose="02110004020202020204"/>
+                <a:ea typeface="+mn-ea"/>
+                <a:cs typeface="+mn-cs"/>
+              </a:rPr>
+              <a:t>© 2016 Kaple Music; Capitol CMG Genesis; Housefires Sounds; Said And Done Music; </a:t>
+            </a:r>
+            <a:r>
+              <a:rPr kumimoji="0" lang="en-US" sz="1800" b="0" i="0" u="none" strike="noStrike" kern="1200" cap="none" spc="0" normalizeH="0" baseline="0" noProof="0" dirty="0" err="1">
+                <a:ln>
+                  <a:noFill/>
+                </a:ln>
+                <a:solidFill>
+                  <a:prstClr val="white"/>
+                </a:solidFill>
+                <a:effectLst/>
+                <a:uLnTx/>
+                <a:uFillTx/>
+                <a:latin typeface="Aptos" panose="02110004020202020204"/>
+                <a:ea typeface="+mn-ea"/>
+                <a:cs typeface="+mn-cs"/>
+              </a:rPr>
+              <a:t>sixsteps</a:t>
+            </a:r>
+            <a:r>
+              <a:rPr kumimoji="0" lang="en-US" sz="1800" b="0" i="0" u="none" strike="noStrike" kern="1200" cap="none" spc="0" normalizeH="0" baseline="0" noProof="0" dirty="0">
+                <a:ln>
+                  <a:noFill/>
+                </a:ln>
+                <a:solidFill>
+                  <a:prstClr val="white"/>
+                </a:solidFill>
+                <a:effectLst/>
+                <a:uLnTx/>
+                <a:uFillTx/>
+                <a:latin typeface="Aptos" panose="02110004020202020204"/>
+                <a:ea typeface="+mn-ea"/>
+                <a:cs typeface="+mn-cs"/>
+              </a:rPr>
+              <a:t> Music; Thankyou Music Ltd; Vamos Publishing; </a:t>
+            </a:r>
+            <a:r>
+              <a:rPr kumimoji="0" lang="en-US" sz="1800" b="0" i="0" u="none" strike="noStrike" kern="1200" cap="none" spc="0" normalizeH="0" baseline="0" noProof="0" dirty="0" err="1">
+                <a:ln>
+                  <a:noFill/>
+                </a:ln>
+                <a:solidFill>
+                  <a:prstClr val="white"/>
+                </a:solidFill>
+                <a:effectLst/>
+                <a:uLnTx/>
+                <a:uFillTx/>
+                <a:latin typeface="Aptos" panose="02110004020202020204"/>
+                <a:ea typeface="+mn-ea"/>
+                <a:cs typeface="+mn-cs"/>
+              </a:rPr>
+              <a:t>worshiptogether.com</a:t>
+            </a:r>
+            <a:r>
+              <a:rPr kumimoji="0" lang="en-US" sz="1800" b="0" i="0" u="none" strike="noStrike" kern="1200" cap="none" spc="0" normalizeH="0" baseline="0" noProof="0" dirty="0">
+                <a:ln>
+                  <a:noFill/>
+                </a:ln>
+                <a:solidFill>
+                  <a:prstClr val="white"/>
+                </a:solidFill>
+                <a:effectLst/>
+                <a:uLnTx/>
+                <a:uFillTx/>
+                <a:latin typeface="Aptos" panose="02110004020202020204"/>
+                <a:ea typeface="+mn-ea"/>
+                <a:cs typeface="+mn-cs"/>
+              </a:rPr>
+              <a:t> songs; Martin, Karl Andrew; Bethel </a:t>
+            </a:r>
+            <a:r>
+              <a:rPr kumimoji="0" lang="en-US" sz="1800" b="0" i="0" u="none" strike="noStrike" kern="1200" cap="none" spc="0" normalizeH="0" baseline="0" noProof="0">
+                <a:ln>
+                  <a:noFill/>
+                </a:ln>
+                <a:solidFill>
+                  <a:prstClr val="white"/>
+                </a:solidFill>
+                <a:effectLst/>
+                <a:uLnTx/>
+                <a:uFillTx/>
+                <a:latin typeface="Aptos" panose="02110004020202020204"/>
+                <a:ea typeface="+mn-ea"/>
+                <a:cs typeface="+mn-cs"/>
+              </a:rPr>
+              <a:t>Music Publishing</a:t>
+            </a:r>
+          </a:p>
+          <a:p>
+            <a:pPr marL="0" marR="0" lvl="0" indent="0" algn="ctr" defTabSz="457200" rtl="0" eaLnBrk="1" fontAlgn="auto" latinLnBrk="0" hangingPunct="1">
+              <a:lnSpc>
+                <a:spcPct val="100000"/>
+              </a:lnSpc>
+              <a:spcBef>
+                <a:spcPts val="0"/>
+              </a:spcBef>
+              <a:spcAft>
+                <a:spcPts val="0"/>
+              </a:spcAft>
+              <a:buClrTx/>
+              <a:buSzTx/>
+              <a:buFontTx/>
+              <a:buNone/>
+              <a:tabLst/>
+              <a:defRPr/>
+            </a:pPr>
+            <a:r>
+              <a:rPr kumimoji="0" lang="en-US" sz="1800" b="0" i="0" u="none" strike="noStrike" kern="1200" cap="none" spc="0" normalizeH="0" baseline="0" noProof="0">
+                <a:ln>
+                  <a:noFill/>
+                </a:ln>
+                <a:solidFill>
+                  <a:prstClr val="white"/>
+                </a:solidFill>
+                <a:effectLst/>
+                <a:uLnTx/>
+                <a:uFillTx/>
+                <a:latin typeface="Aptos" panose="02110004020202020204"/>
+                <a:ea typeface="+mn-ea"/>
+                <a:cs typeface="+mn-cs"/>
+              </a:rPr>
+              <a:t>CCLI </a:t>
+            </a:r>
+            <a:r>
+              <a:rPr kumimoji="0" lang="en-US" sz="1800" b="0" i="0" u="none" strike="noStrike" kern="1200" cap="none" spc="0" normalizeH="0" baseline="0" noProof="0" dirty="0">
+                <a:ln>
+                  <a:noFill/>
+                </a:ln>
+                <a:solidFill>
+                  <a:prstClr val="white"/>
+                </a:solidFill>
+                <a:effectLst/>
+                <a:uLnTx/>
+                <a:uFillTx/>
+                <a:latin typeface="Aptos" panose="02110004020202020204"/>
+                <a:ea typeface="+mn-ea"/>
+                <a:cs typeface="+mn-cs"/>
+              </a:rPr>
+              <a:t>License #137776</a:t>
+            </a:r>
+          </a:p>
+        </p:txBody>
+      </p:sp>
     </p:spTree>
     <p:extLst>
       <p:ext uri="{BB962C8B-B14F-4D97-AF65-F5344CB8AC3E}">
